--- a/delivery-resources/ILL335-Train-the-Trainer-FY27.pptx
+++ b/delivery-resources/ILL335-Train-the-Trainer-FY27.pptx
@@ -2,24 +2,23 @@
 <file path=ppt/presentation.xml><?xml version="1.0" encoding="utf-8"?>
 <p:presentation xmlns:a="http://schemas.openxmlformats.org/drawingml/2006/main" xmlns:r="http://schemas.openxmlformats.org/officeDocument/2006/relationships" xmlns:p="http://schemas.openxmlformats.org/presentationml/2006/main" saveSubsetFonts="1" autoCompressPictures="0">
   <p:sldMasterIdLst>
-    <p:sldMasterId id="2147483648" r:id="rId1"/>
+    <p:sldMasterId id="2147483648" r:id="rId4"/>
   </p:sldMasterIdLst>
   <p:sldIdLst>
-    <p:sldId id="2147479540" r:id="rId2"/>
-    <p:sldId id="2147479558" r:id="rId3"/>
-    <p:sldId id="257" r:id="rId4"/>
-    <p:sldId id="258" r:id="rId5"/>
-    <p:sldId id="259" r:id="rId6"/>
-    <p:sldId id="260" r:id="rId7"/>
-    <p:sldId id="261" r:id="rId8"/>
-    <p:sldId id="262" r:id="rId9"/>
-    <p:sldId id="263" r:id="rId10"/>
-    <p:sldId id="264" r:id="rId11"/>
-    <p:sldId id="265" r:id="rId12"/>
-    <p:sldId id="266" r:id="rId13"/>
-    <p:sldId id="267" r:id="rId14"/>
-    <p:sldId id="268" r:id="rId15"/>
-    <p:sldId id="2147479528" r:id="rId16"/>
+    <p:sldId id="2147479540" r:id="rId5"/>
+    <p:sldId id="2147479558" r:id="rId6"/>
+    <p:sldId id="257" r:id="rId7"/>
+    <p:sldId id="258" r:id="rId8"/>
+    <p:sldId id="259" r:id="rId9"/>
+    <p:sldId id="260" r:id="rId10"/>
+    <p:sldId id="261" r:id="rId11"/>
+    <p:sldId id="262" r:id="rId12"/>
+    <p:sldId id="263" r:id="rId13"/>
+    <p:sldId id="264" r:id="rId14"/>
+    <p:sldId id="265" r:id="rId15"/>
+    <p:sldId id="266" r:id="rId16"/>
+    <p:sldId id="267" r:id="rId17"/>
+    <p:sldId id="268" r:id="rId18"/>
   </p:sldIdLst>
   <p:sldSz cx="12192000" cy="6858000"/>
   <p:notesSz cx="6858000" cy="9144000"/>
@@ -137,6 +136,57 @@
 </p:presentation>
 </file>
 
+<file path=ppt/changesInfos/changesInfo1.xml><?xml version="1.0" encoding="utf-8"?>
+<pc:chgInfo xmlns:a="http://schemas.openxmlformats.org/drawingml/2006/main" xmlns:r="http://schemas.openxmlformats.org/officeDocument/2006/relationships" xmlns:ac="http://schemas.microsoft.com/office/drawing/2013/main/command" xmlns:pc="http://schemas.microsoft.com/office/powerpoint/2013/main/command">
+  <pc:docChgLst>
+    <pc:chgData name="Daniela Siorek (SYNAXIS CORPORATION)" userId="622c6b35-66dd-425f-b550-df480cf6e77c" providerId="ADAL" clId="{9AD8B92E-9B58-4964-B865-EFE46FB138AA}"/>
+    <pc:docChg chg="delSld modSld">
+      <pc:chgData name="Daniela Siorek (SYNAXIS CORPORATION)" userId="622c6b35-66dd-425f-b550-df480cf6e77c" providerId="ADAL" clId="{9AD8B92E-9B58-4964-B865-EFE46FB138AA}" dt="2026-09-08T18:09:35.374" v="9" actId="47"/>
+      <pc:docMkLst>
+        <pc:docMk/>
+      </pc:docMkLst>
+      <pc:sldChg chg="del">
+        <pc:chgData name="Daniela Siorek (SYNAXIS CORPORATION)" userId="622c6b35-66dd-425f-b550-df480cf6e77c" providerId="ADAL" clId="{9AD8B92E-9B58-4964-B865-EFE46FB138AA}" dt="2026-09-08T18:09:35.374" v="9" actId="47"/>
+        <pc:sldMkLst>
+          <pc:docMk/>
+          <pc:sldMk cId="4061082036" sldId="2147479528"/>
+        </pc:sldMkLst>
+      </pc:sldChg>
+      <pc:sldChg chg="modSp mod">
+        <pc:chgData name="Daniela Siorek (SYNAXIS CORPORATION)" userId="622c6b35-66dd-425f-b550-df480cf6e77c" providerId="ADAL" clId="{9AD8B92E-9B58-4964-B865-EFE46FB138AA}" dt="2026-09-08T18:09:13.681" v="8" actId="14100"/>
+        <pc:sldMkLst>
+          <pc:docMk/>
+          <pc:sldMk cId="143569297" sldId="2147479558"/>
+        </pc:sldMkLst>
+        <pc:spChg chg="mod">
+          <ac:chgData name="Daniela Siorek (SYNAXIS CORPORATION)" userId="622c6b35-66dd-425f-b550-df480cf6e77c" providerId="ADAL" clId="{9AD8B92E-9B58-4964-B865-EFE46FB138AA}" dt="2026-09-08T18:09:13.681" v="8" actId="14100"/>
+          <ac:spMkLst>
+            <pc:docMk/>
+            <pc:sldMk cId="143569297" sldId="2147479558"/>
+            <ac:spMk id="3" creationId="{13AA93F6-0237-907D-C0B7-ACABF04C7E9B}"/>
+          </ac:spMkLst>
+        </pc:spChg>
+      </pc:sldChg>
+      <pc:sldMasterChg chg="delSldLayout">
+        <pc:chgData name="Daniela Siorek (SYNAXIS CORPORATION)" userId="622c6b35-66dd-425f-b550-df480cf6e77c" providerId="ADAL" clId="{9AD8B92E-9B58-4964-B865-EFE46FB138AA}" dt="2026-09-08T18:09:35.374" v="9" actId="47"/>
+        <pc:sldMasterMkLst>
+          <pc:docMk/>
+          <pc:sldMasterMk cId="2209977519" sldId="2147483648"/>
+        </pc:sldMasterMkLst>
+        <pc:sldLayoutChg chg="del">
+          <pc:chgData name="Daniela Siorek (SYNAXIS CORPORATION)" userId="622c6b35-66dd-425f-b550-df480cf6e77c" providerId="ADAL" clId="{9AD8B92E-9B58-4964-B865-EFE46FB138AA}" dt="2026-09-08T18:09:35.374" v="9" actId="47"/>
+          <pc:sldLayoutMkLst>
+            <pc:docMk/>
+            <pc:sldMasterMk cId="2209977519" sldId="2147483648"/>
+            <pc:sldLayoutMk cId="437009877" sldId="2147483660"/>
+          </pc:sldLayoutMkLst>
+        </pc:sldLayoutChg>
+      </pc:sldMasterChg>
+    </pc:docChg>
+  </pc:docChgLst>
+</pc:chgInfo>
+</file>
+
 <file path=ppt/slideLayouts/slideLayout1.xml><?xml version="1.0" encoding="utf-8"?>
 <p:sldLayout xmlns:a="http://schemas.openxmlformats.org/drawingml/2006/main" xmlns:r="http://schemas.openxmlformats.org/officeDocument/2006/relationships" xmlns:p="http://schemas.openxmlformats.org/presentationml/2006/main" type="title" preserve="1">
   <p:cSld name="Title Slide">
@@ -316,7 +366,7 @@
           <a:p>
             <a:fld id="{5BCAD085-E8A6-8845-BD4E-CB4CCA059FC4}" type="datetimeFigureOut">
               <a:rPr lang="en-US" smtClean="0"/>
-              <a:t>8/25/2026</a:t>
+              <a:t>9/8/2026</a:t>
             </a:fld>
             <a:endParaRPr lang="en-US"/>
           </a:p>
@@ -484,7 +534,7 @@
           <a:p>
             <a:fld id="{5BCAD085-E8A6-8845-BD4E-CB4CCA059FC4}" type="datetimeFigureOut">
               <a:rPr lang="en-US" smtClean="0"/>
-              <a:t>8/25/2026</a:t>
+              <a:t>9/8/2026</a:t>
             </a:fld>
             <a:endParaRPr lang="en-US"/>
           </a:p>
@@ -662,7 +712,7 @@
           <a:p>
             <a:fld id="{5BCAD085-E8A6-8845-BD4E-CB4CCA059FC4}" type="datetimeFigureOut">
               <a:rPr lang="en-US" smtClean="0"/>
-              <a:t>8/25/2026</a:t>
+              <a:t>9/8/2026</a:t>
             </a:fld>
             <a:endParaRPr lang="en-US"/>
           </a:p>
@@ -724,127 +774,6 @@
 </file>
 
 <file path=ppt/slideLayouts/slideLayout12.xml><?xml version="1.0" encoding="utf-8"?>
-<p:sldLayout xmlns:a="http://schemas.openxmlformats.org/drawingml/2006/main" xmlns:r="http://schemas.openxmlformats.org/officeDocument/2006/relationships" xmlns:p="http://schemas.openxmlformats.org/presentationml/2006/main">
-  <p:cSld name="Closing logo slide">
-    <p:bg>
-      <p:bgRef idx="1001">
-        <a:schemeClr val="bg2"/>
-      </p:bgRef>
-    </p:bg>
-    <p:spTree>
-      <p:nvGrpSpPr>
-        <p:cNvPr id="1" name=""/>
-        <p:cNvGrpSpPr/>
-        <p:nvPr/>
-      </p:nvGrpSpPr>
-      <p:grpSpPr>
-        <a:xfrm>
-          <a:off x="0" y="0"/>
-          <a:ext cx="0" cy="0"/>
-          <a:chOff x="0" y="0"/>
-          <a:chExt cx="0" cy="0"/>
-        </a:xfrm>
-      </p:grpSpPr>
-      <p:sp>
-        <p:nvSpPr>
-          <p:cNvPr id="2" name="Text Box 3" descr="This is a copyright notice that should be included on the final slide."/>
-          <p:cNvSpPr txBox="1">
-            <a:spLocks noChangeArrowheads="1"/>
-          </p:cNvSpPr>
-          <p:nvPr/>
-        </p:nvSpPr>
-        <p:spPr bwMode="blackWhite">
-          <a:xfrm>
-            <a:off x="584200" y="6161316"/>
-            <a:ext cx="4482124" cy="107722"/>
-          </a:xfrm>
-          <a:prstGeom prst="rect">
-            <a:avLst/>
-          </a:prstGeom>
-          <a:noFill/>
-          <a:ln w="12700">
-            <a:noFill/>
-            <a:miter lim="800000"/>
-            <a:headEnd type="none" w="sm" len="sm"/>
-            <a:tailEnd type="none" w="sm" len="sm"/>
-          </a:ln>
-          <a:effectLst/>
-        </p:spPr>
-        <p:txBody>
-          <a:bodyPr vert="horz" wrap="square" lIns="0" tIns="0" rIns="0" bIns="0" numCol="1" anchor="b" anchorCtr="0" compatLnSpc="1">
-            <a:prstTxWarp prst="textNoShape">
-              <a:avLst/>
-            </a:prstTxWarp>
-            <a:spAutoFit/>
-          </a:bodyPr>
-          <a:lstStyle/>
-          <a:p>
-            <a:pPr defTabSz="932290" eaLnBrk="0" hangingPunct="0"/>
-            <a:r>
-              <a:rPr lang="en-US" sz="700" dirty="0">
-                <a:solidFill>
-                  <a:schemeClr val="tx1"/>
-                </a:solidFill>
-                <a:cs typeface="Segoe UI" pitchFamily="34" charset="0"/>
-              </a:rPr>
-              <a:t>© Copyright Microsoft Corporation. All rights reserved. </a:t>
-            </a:r>
-          </a:p>
-        </p:txBody>
-      </p:sp>
-      <p:pic>
-        <p:nvPicPr>
-          <p:cNvPr id="5" name="MS logo white - EMF" descr="Microsoft logo white text version">
-            <a:extLst>
-              <a:ext uri="{FF2B5EF4-FFF2-40B4-BE49-F238E27FC236}">
-                <a16:creationId xmlns:a16="http://schemas.microsoft.com/office/drawing/2014/main" id="{70D3778F-A717-44C8-9013-FF206B15DD6D}"/>
-              </a:ext>
-            </a:extLst>
-          </p:cNvPr>
-          <p:cNvPicPr>
-            <a:picLocks noChangeAspect="1"/>
-          </p:cNvPicPr>
-          <p:nvPr/>
-        </p:nvPicPr>
-        <p:blipFill>
-          <a:blip r:embed="rId2" cstate="print">
-            <a:extLst>
-              <a:ext uri="{28A0092B-C50C-407E-A947-70E740481C1C}">
-                <a14:useLocalDpi xmlns:a14="http://schemas.microsoft.com/office/drawing/2010/main"/>
-              </a:ext>
-            </a:extLst>
-          </a:blip>
-          <a:stretch>
-            <a:fillRect/>
-          </a:stretch>
-        </p:blipFill>
-        <p:spPr bwMode="black">
-          <a:xfrm>
-            <a:off x="584200" y="585788"/>
-            <a:ext cx="1366245" cy="292608"/>
-          </a:xfrm>
-          <a:prstGeom prst="rect">
-            <a:avLst/>
-          </a:prstGeom>
-        </p:spPr>
-      </p:pic>
-    </p:spTree>
-    <p:extLst>
-      <p:ext uri="{BB962C8B-B14F-4D97-AF65-F5344CB8AC3E}">
-        <p14:creationId xmlns:p14="http://schemas.microsoft.com/office/powerpoint/2010/main" val="437009877"/>
-      </p:ext>
-    </p:extLst>
-  </p:cSld>
-  <p:clrMapOvr>
-    <a:overrideClrMapping bg1="dk1" tx1="lt1" bg2="dk2" tx2="lt2" accent1="accent1" accent2="accent2" accent3="accent3" accent4="accent4" accent5="accent5" accent6="accent6" hlink="hlink" folHlink="folHlink"/>
-  </p:clrMapOvr>
-  <p:transition>
-    <p:fade/>
-  </p:transition>
-</p:sldLayout>
-</file>
-
-<file path=ppt/slideLayouts/slideLayout13.xml><?xml version="1.0" encoding="utf-8"?>
 <p:sldLayout xmlns:a="http://schemas.openxmlformats.org/drawingml/2006/main" xmlns:r="http://schemas.openxmlformats.org/officeDocument/2006/relationships" xmlns:p="http://schemas.openxmlformats.org/presentationml/2006/main" userDrawn="1">
   <p:cSld name="Walkin">
     <p:bg>
@@ -3401,7 +3330,7 @@
 </p:sldLayout>
 </file>
 
-<file path=ppt/slideLayouts/slideLayout14.xml><?xml version="1.0" encoding="utf-8"?>
+<file path=ppt/slideLayouts/slideLayout13.xml><?xml version="1.0" encoding="utf-8"?>
 <p:sldLayout xmlns:a="http://schemas.openxmlformats.org/drawingml/2006/main" xmlns:r="http://schemas.openxmlformats.org/officeDocument/2006/relationships" xmlns:p="http://schemas.openxmlformats.org/presentationml/2006/main">
   <p:cSld name="1_Title Slide">
     <p:bg>
@@ -3739,7 +3668,7 @@
           <a:p>
             <a:fld id="{5BCAD085-E8A6-8845-BD4E-CB4CCA059FC4}" type="datetimeFigureOut">
               <a:rPr lang="en-US" smtClean="0"/>
-              <a:t>8/25/2026</a:t>
+              <a:t>9/8/2026</a:t>
             </a:fld>
             <a:endParaRPr lang="en-US"/>
           </a:p>
@@ -3984,7 +3913,7 @@
           <a:p>
             <a:fld id="{5BCAD085-E8A6-8845-BD4E-CB4CCA059FC4}" type="datetimeFigureOut">
               <a:rPr lang="en-US" smtClean="0"/>
-              <a:t>8/25/2026</a:t>
+              <a:t>9/8/2026</a:t>
             </a:fld>
             <a:endParaRPr lang="en-US"/>
           </a:p>
@@ -4269,7 +4198,7 @@
           <a:p>
             <a:fld id="{5BCAD085-E8A6-8845-BD4E-CB4CCA059FC4}" type="datetimeFigureOut">
               <a:rPr lang="en-US" smtClean="0"/>
-              <a:t>8/25/2026</a:t>
+              <a:t>9/8/2026</a:t>
             </a:fld>
             <a:endParaRPr lang="en-US"/>
           </a:p>
@@ -4688,7 +4617,7 @@
           <a:p>
             <a:fld id="{5BCAD085-E8A6-8845-BD4E-CB4CCA059FC4}" type="datetimeFigureOut">
               <a:rPr lang="en-US" smtClean="0"/>
-              <a:t>8/25/2026</a:t>
+              <a:t>9/8/2026</a:t>
             </a:fld>
             <a:endParaRPr lang="en-US"/>
           </a:p>
@@ -4805,7 +4734,7 @@
           <a:p>
             <a:fld id="{5BCAD085-E8A6-8845-BD4E-CB4CCA059FC4}" type="datetimeFigureOut">
               <a:rPr lang="en-US" smtClean="0"/>
-              <a:t>8/25/2026</a:t>
+              <a:t>9/8/2026</a:t>
             </a:fld>
             <a:endParaRPr lang="en-US"/>
           </a:p>
@@ -4900,7 +4829,7 @@
           <a:p>
             <a:fld id="{5BCAD085-E8A6-8845-BD4E-CB4CCA059FC4}" type="datetimeFigureOut">
               <a:rPr lang="en-US" smtClean="0"/>
-              <a:t>8/25/2026</a:t>
+              <a:t>9/8/2026</a:t>
             </a:fld>
             <a:endParaRPr lang="en-US"/>
           </a:p>
@@ -5175,7 +5104,7 @@
           <a:p>
             <a:fld id="{5BCAD085-E8A6-8845-BD4E-CB4CCA059FC4}" type="datetimeFigureOut">
               <a:rPr lang="en-US" smtClean="0"/>
-              <a:t>8/25/2026</a:t>
+              <a:t>9/8/2026</a:t>
             </a:fld>
             <a:endParaRPr lang="en-US"/>
           </a:p>
@@ -5427,7 +5356,7 @@
           <a:p>
             <a:fld id="{5BCAD085-E8A6-8845-BD4E-CB4CCA059FC4}" type="datetimeFigureOut">
               <a:rPr lang="en-US" smtClean="0"/>
-              <a:t>8/25/2026</a:t>
+              <a:t>9/8/2026</a:t>
             </a:fld>
             <a:endParaRPr lang="en-US"/>
           </a:p>
@@ -5638,7 +5567,7 @@
           <a:p>
             <a:fld id="{5BCAD085-E8A6-8845-BD4E-CB4CCA059FC4}" type="datetimeFigureOut">
               <a:rPr lang="en-US" smtClean="0"/>
-              <a:t>8/25/2026</a:t>
+              <a:t>9/8/2026</a:t>
             </a:fld>
             <a:endParaRPr lang="en-US"/>
           </a:p>
@@ -5742,9 +5671,8 @@
     <p:sldLayoutId id="2147483657" r:id="rId9"/>
     <p:sldLayoutId id="2147483658" r:id="rId10"/>
     <p:sldLayoutId id="2147483659" r:id="rId11"/>
-    <p:sldLayoutId id="2147483660" r:id="rId12"/>
-    <p:sldLayoutId id="2147483661" r:id="rId13"/>
-    <p:sldLayoutId id="2147483662" r:id="rId14"/>
+    <p:sldLayoutId id="2147483661" r:id="rId12"/>
+    <p:sldLayoutId id="2147483662" r:id="rId13"/>
   </p:sldLayoutIdLst>
   <p:txStyles>
     <p:titleStyle>
@@ -11445,74 +11373,6 @@
 </p:sld>
 </file>
 
-<file path=ppt/slides/slide15.xml><?xml version="1.0" encoding="utf-8"?>
-<p:sld xmlns:a="http://schemas.openxmlformats.org/drawingml/2006/main" xmlns:r="http://schemas.openxmlformats.org/officeDocument/2006/relationships" xmlns:p="http://schemas.openxmlformats.org/presentationml/2006/main">
-  <p:cSld>
-    <p:spTree>
-      <p:nvGrpSpPr>
-        <p:cNvPr id="1" name=""/>
-        <p:cNvGrpSpPr/>
-        <p:nvPr/>
-      </p:nvGrpSpPr>
-      <p:grpSpPr>
-        <a:xfrm>
-          <a:off x="0" y="0"/>
-          <a:ext cx="0" cy="0"/>
-          <a:chOff x="0" y="0"/>
-          <a:chExt cx="0" cy="0"/>
-        </a:xfrm>
-      </p:grpSpPr>
-      <p:sp>
-        <p:nvSpPr>
-          <p:cNvPr id="3" name="Title 2">
-            <a:extLst>
-              <a:ext uri="{FF2B5EF4-FFF2-40B4-BE49-F238E27FC236}">
-                <a16:creationId xmlns:a16="http://schemas.microsoft.com/office/drawing/2014/main" id="{E6BFE083-6F48-97C6-928D-AC622FDA3FA0}"/>
-              </a:ext>
-            </a:extLst>
-          </p:cNvPr>
-          <p:cNvSpPr>
-            <a:spLocks noGrp="1"/>
-          </p:cNvSpPr>
-          <p:nvPr>
-            <p:ph type="title" idx="4294967295"/>
-          </p:nvPr>
-        </p:nvSpPr>
-        <p:spPr>
-          <a:xfrm>
-            <a:off x="588263" y="-603693"/>
-            <a:ext cx="11018520" cy="553998"/>
-          </a:xfrm>
-        </p:spPr>
-        <p:txBody>
-          <a:bodyPr vert="horz" wrap="square" lIns="0" tIns="0" rIns="0" bIns="0" rtlCol="0" anchor="b">
-            <a:spAutoFit/>
-          </a:bodyPr>
-          <a:lstStyle/>
-          <a:p>
-            <a:r>
-              <a:rPr lang="en-US" dirty="0"/>
-              <a:t>Microsoft Logo</a:t>
-            </a:r>
-          </a:p>
-        </p:txBody>
-      </p:sp>
-    </p:spTree>
-    <p:extLst>
-      <p:ext uri="{BB962C8B-B14F-4D97-AF65-F5344CB8AC3E}">
-        <p14:creationId xmlns:p14="http://schemas.microsoft.com/office/powerpoint/2010/main" val="4061082036"/>
-      </p:ext>
-    </p:extLst>
-  </p:cSld>
-  <p:clrMapOvr>
-    <a:masterClrMapping/>
-  </p:clrMapOvr>
-  <p:transition>
-    <p:fade/>
-  </p:transition>
-</p:sld>
-</file>
-
 <file path=ppt/slides/slide2.xml><?xml version="1.0" encoding="utf-8"?>
 <p:sld xmlns:a="http://schemas.openxmlformats.org/drawingml/2006/main" xmlns:r="http://schemas.openxmlformats.org/officeDocument/2006/relationships" xmlns:p="http://schemas.openxmlformats.org/presentationml/2006/main">
   <p:cSld>
@@ -11589,7 +11449,7 @@
         <p:spPr>
           <a:xfrm>
             <a:off x="584199" y="3962399"/>
-            <a:ext cx="5577839" cy="276999"/>
+            <a:ext cx="6502401" cy="553998"/>
           </a:xfrm>
         </p:spPr>
         <p:txBody>
@@ -11598,7 +11458,7 @@
           <a:p>
             <a:r>
               <a:rPr lang="en-GB" dirty="0"/>
-              <a:t>Building &amp; Deploying AI Agents with Microsoft Foundry</a:t>
+              <a:t>ILL335: Building &amp; Deploying AI Agents with Microsoft Foundry</a:t>
             </a:r>
           </a:p>
         </p:txBody>
@@ -17906,8 +17766,388 @@
 </a:theme>
 </file>
 
+<file path=customXml/item1.xml><?xml version="1.0" encoding="utf-8"?>
+<p:properties xmlns:p="http://schemas.microsoft.com/office/2006/metadata/properties" xmlns:xsi="http://www.w3.org/2001/XMLSchema-instance" xmlns:pc="http://schemas.microsoft.com/office/infopath/2007/PartnerControls">
+  <documentManagement>
+    <_ip_UnifiedCompliancePolicyUIAction xmlns="http://schemas.microsoft.com/sharepoint/v3" xsi:nil="true"/>
+    <_ip_UnifiedCompliancePolicyProperties xmlns="http://schemas.microsoft.com/sharepoint/v3" xsi:nil="true"/>
+    <lcf76f155ced4ddcb4097134ff3c332f xmlns="804751ba-60e0-4191-9865-d7e5284c1d69">
+      <Terms xmlns="http://schemas.microsoft.com/office/infopath/2007/PartnerControls"/>
+    </lcf76f155ced4ddcb4097134ff3c332f>
+    <Number xmlns="804751ba-60e0-4191-9865-d7e5284c1d69" xsi:nil="true"/>
+    <TaxCatchAll xmlns="230e9df3-be65-4c73-a93b-d1236ebd677e" xsi:nil="true"/>
+    <Time xmlns="804751ba-60e0-4191-9865-d7e5284c1d69" xsi:nil="true"/>
+    <content xmlns="804751ba-60e0-4191-9865-d7e5284c1d69" xsi:nil="true"/>
+  </documentManagement>
+</p:properties>
+</file>
+
+<file path=customXml/item2.xml><?xml version="1.0" encoding="utf-8"?>
+<?mso-contentType ?>
+<FormTemplates xmlns="http://schemas.microsoft.com/sharepoint/v3/contenttype/forms">
+  <Display>DocumentLibraryForm</Display>
+  <Edit>DocumentLibraryForm</Edit>
+  <New>DocumentLibraryForm</New>
+</FormTemplates>
+</file>
+
+<file path=customXml/item3.xml><?xml version="1.0" encoding="utf-8"?>
+<ct:contentTypeSchema xmlns:ct="http://schemas.microsoft.com/office/2006/metadata/contentType" xmlns:ma="http://schemas.microsoft.com/office/2006/metadata/properties/metaAttributes" ct:_="" ma:_="" ma:contentTypeName="Document" ma:contentTypeID="0x0101002FE71A6B924FC94981CCAD1A585590D8" ma:contentTypeVersion="27" ma:contentTypeDescription="Create a new document." ma:contentTypeScope="" ma:versionID="566528f2922ad54e26a908d2133454c1">
+  <xsd:schema xmlns:xsd="http://www.w3.org/2001/XMLSchema" xmlns:xs="http://www.w3.org/2001/XMLSchema" xmlns:p="http://schemas.microsoft.com/office/2006/metadata/properties" xmlns:ns1="http://schemas.microsoft.com/sharepoint/v3" xmlns:ns2="804751ba-60e0-4191-9865-d7e5284c1d69" xmlns:ns3="913b567d-4c83-4181-a45c-f04ce7e1b72e" xmlns:ns4="230e9df3-be65-4c73-a93b-d1236ebd677e" targetNamespace="http://schemas.microsoft.com/office/2006/metadata/properties" ma:root="true" ma:fieldsID="6c91453d1ce2972ce38a1123b4b20cb5" ns1:_="" ns2:_="" ns3:_="" ns4:_="">
+    <xsd:import namespace="http://schemas.microsoft.com/sharepoint/v3"/>
+    <xsd:import namespace="804751ba-60e0-4191-9865-d7e5284c1d69"/>
+    <xsd:import namespace="913b567d-4c83-4181-a45c-f04ce7e1b72e"/>
+    <xsd:import namespace="230e9df3-be65-4c73-a93b-d1236ebd677e"/>
+    <xsd:element name="properties">
+      <xsd:complexType>
+        <xsd:sequence>
+          <xsd:element name="documentManagement">
+            <xsd:complexType>
+              <xsd:all>
+                <xsd:element ref="ns2:MediaServiceMetadata" minOccurs="0"/>
+                <xsd:element ref="ns2:MediaServiceFastMetadata" minOccurs="0"/>
+                <xsd:element ref="ns2:MediaServiceDateTaken" minOccurs="0"/>
+                <xsd:element ref="ns3:SharedWithUsers" minOccurs="0"/>
+                <xsd:element ref="ns3:SharedWithDetails" minOccurs="0"/>
+                <xsd:element ref="ns2:MediaServiceGenerationTime" minOccurs="0"/>
+                <xsd:element ref="ns2:MediaServiceEventHashCode" minOccurs="0"/>
+                <xsd:element ref="ns2:MediaServiceAutoKeyPoints" minOccurs="0"/>
+                <xsd:element ref="ns2:MediaServiceKeyPoints" minOccurs="0"/>
+                <xsd:element ref="ns2:MediaServiceOCR" minOccurs="0"/>
+                <xsd:element ref="ns2:MediaServiceLocation" minOccurs="0"/>
+                <xsd:element ref="ns1:_ip_UnifiedCompliancePolicyProperties" minOccurs="0"/>
+                <xsd:element ref="ns1:_ip_UnifiedCompliancePolicyUIAction" minOccurs="0"/>
+                <xsd:element ref="ns2:Number" minOccurs="0"/>
+                <xsd:element ref="ns2:MediaLengthInSeconds" minOccurs="0"/>
+                <xsd:element ref="ns2:lcf76f155ced4ddcb4097134ff3c332f" minOccurs="0"/>
+                <xsd:element ref="ns4:TaxCatchAll" minOccurs="0"/>
+                <xsd:element ref="ns2:Time" minOccurs="0"/>
+                <xsd:element ref="ns2:MediaServiceSearchProperties" minOccurs="0"/>
+                <xsd:element ref="ns2:MediaServiceObjectDetectorVersions" minOccurs="0"/>
+                <xsd:element ref="ns2:TranslatedLang" minOccurs="0"/>
+                <xsd:element ref="ns2:content" minOccurs="0"/>
+                <xsd:element ref="ns2:MediaServiceDocTags" minOccurs="0"/>
+                <xsd:element ref="ns2:MediaServiceBillingMetadata" minOccurs="0"/>
+              </xsd:all>
+            </xsd:complexType>
+          </xsd:element>
+        </xsd:sequence>
+      </xsd:complexType>
+    </xsd:element>
+  </xsd:schema>
+  <xsd:schema xmlns:xsd="http://www.w3.org/2001/XMLSchema" xmlns:xs="http://www.w3.org/2001/XMLSchema" xmlns:dms="http://schemas.microsoft.com/office/2006/documentManagement/types" xmlns:pc="http://schemas.microsoft.com/office/infopath/2007/PartnerControls" targetNamespace="http://schemas.microsoft.com/sharepoint/v3" elementFormDefault="qualified">
+    <xsd:import namespace="http://schemas.microsoft.com/office/2006/documentManagement/types"/>
+    <xsd:import namespace="http://schemas.microsoft.com/office/infopath/2007/PartnerControls"/>
+    <xsd:element name="_ip_UnifiedCompliancePolicyProperties" ma:index="19" nillable="true" ma:displayName="Unified Compliance Policy Properties" ma:hidden="true" ma:internalName="_ip_UnifiedCompliancePolicyProperties" ma:readOnly="false">
+      <xsd:simpleType>
+        <xsd:restriction base="dms:Note"/>
+      </xsd:simpleType>
+    </xsd:element>
+    <xsd:element name="_ip_UnifiedCompliancePolicyUIAction" ma:index="20" nillable="true" ma:displayName="Unified Compliance Policy UI Action" ma:hidden="true" ma:internalName="_ip_UnifiedCompliancePolicyUIAction" ma:readOnly="false">
+      <xsd:simpleType>
+        <xsd:restriction base="dms:Text"/>
+      </xsd:simpleType>
+    </xsd:element>
+  </xsd:schema>
+  <xsd:schema xmlns:xsd="http://www.w3.org/2001/XMLSchema" xmlns:xs="http://www.w3.org/2001/XMLSchema" xmlns:dms="http://schemas.microsoft.com/office/2006/documentManagement/types" xmlns:pc="http://schemas.microsoft.com/office/infopath/2007/PartnerControls" targetNamespace="804751ba-60e0-4191-9865-d7e5284c1d69" elementFormDefault="qualified">
+    <xsd:import namespace="http://schemas.microsoft.com/office/2006/documentManagement/types"/>
+    <xsd:import namespace="http://schemas.microsoft.com/office/infopath/2007/PartnerControls"/>
+    <xsd:element name="MediaServiceMetadata" ma:index="8" nillable="true" ma:displayName="MediaServiceMetadata" ma:hidden="true" ma:internalName="MediaServiceMetadata" ma:readOnly="true">
+      <xsd:simpleType>
+        <xsd:restriction base="dms:Note"/>
+      </xsd:simpleType>
+    </xsd:element>
+    <xsd:element name="MediaServiceFastMetadata" ma:index="9" nillable="true" ma:displayName="MediaServiceFastMetadata" ma:hidden="true" ma:internalName="MediaServiceFastMetadata" ma:readOnly="true">
+      <xsd:simpleType>
+        <xsd:restriction base="dms:Note"/>
+      </xsd:simpleType>
+    </xsd:element>
+    <xsd:element name="MediaServiceDateTaken" ma:index="10" nillable="true" ma:displayName="MediaServiceDateTaken" ma:hidden="true" ma:internalName="MediaServiceDateTaken" ma:readOnly="true">
+      <xsd:simpleType>
+        <xsd:restriction base="dms:Text"/>
+      </xsd:simpleType>
+    </xsd:element>
+    <xsd:element name="MediaServiceGenerationTime" ma:index="13" nillable="true" ma:displayName="MediaServiceGenerationTime" ma:hidden="true" ma:internalName="MediaServiceGenerationTime" ma:readOnly="true">
+      <xsd:simpleType>
+        <xsd:restriction base="dms:Text"/>
+      </xsd:simpleType>
+    </xsd:element>
+    <xsd:element name="MediaServiceEventHashCode" ma:index="14" nillable="true" ma:displayName="MediaServiceEventHashCode" ma:hidden="true" ma:internalName="MediaServiceEventHashCode" ma:readOnly="true">
+      <xsd:simpleType>
+        <xsd:restriction base="dms:Text"/>
+      </xsd:simpleType>
+    </xsd:element>
+    <xsd:element name="MediaServiceAutoKeyPoints" ma:index="15" nillable="true" ma:displayName="MediaServiceAutoKeyPoints" ma:hidden="true" ma:internalName="MediaServiceAutoKeyPoints" ma:readOnly="true">
+      <xsd:simpleType>
+        <xsd:restriction base="dms:Note"/>
+      </xsd:simpleType>
+    </xsd:element>
+    <xsd:element name="MediaServiceKeyPoints" ma:index="16" nillable="true" ma:displayName="KeyPoints" ma:hidden="true" ma:internalName="MediaServiceKeyPoints" ma:readOnly="true">
+      <xsd:simpleType>
+        <xsd:restriction base="dms:Note"/>
+      </xsd:simpleType>
+    </xsd:element>
+    <xsd:element name="MediaServiceOCR" ma:index="17" nillable="true" ma:displayName="Extracted Text" ma:hidden="true" ma:internalName="MediaServiceOCR" ma:readOnly="true">
+      <xsd:simpleType>
+        <xsd:restriction base="dms:Note"/>
+      </xsd:simpleType>
+    </xsd:element>
+    <xsd:element name="MediaServiceLocation" ma:index="18" nillable="true" ma:displayName="Location" ma:hidden="true" ma:internalName="MediaServiceLocation" ma:readOnly="true">
+      <xsd:simpleType>
+        <xsd:restriction base="dms:Text"/>
+      </xsd:simpleType>
+    </xsd:element>
+    <xsd:element name="Number" ma:index="21" nillable="true" ma:displayName="Number" ma:format="Dropdown" ma:internalName="Number" ma:percentage="FALSE">
+      <xsd:simpleType>
+        <xsd:restriction base="dms:Number"/>
+      </xsd:simpleType>
+    </xsd:element>
+    <xsd:element name="MediaLengthInSeconds" ma:index="22" nillable="true" ma:displayName="Length (seconds)" ma:internalName="MediaLengthInSeconds" ma:readOnly="true">
+      <xsd:simpleType>
+        <xsd:restriction base="dms:Unknown"/>
+      </xsd:simpleType>
+    </xsd:element>
+    <xsd:element name="lcf76f155ced4ddcb4097134ff3c332f" ma:index="24" nillable="true" ma:taxonomy="true" ma:internalName="lcf76f155ced4ddcb4097134ff3c332f" ma:taxonomyFieldName="MediaServiceImageTags" ma:displayName="Image Tags" ma:readOnly="false" ma:fieldId="{5cf76f15-5ced-4ddc-b409-7134ff3c332f}" ma:taxonomyMulti="true" ma:sspId="e385fb40-52d4-4fae-9c5b-3e8ff8a5878e" ma:termSetId="09814cd3-568e-fe90-9814-8d621ff8fb84" ma:anchorId="fba54fb3-c3e1-fe81-a776-ca4b69148c4d" ma:open="true" ma:isKeyword="false">
+      <xsd:complexType>
+        <xsd:sequence>
+          <xsd:element ref="pc:Terms" minOccurs="0" maxOccurs="1"/>
+        </xsd:sequence>
+      </xsd:complexType>
+    </xsd:element>
+    <xsd:element name="Time" ma:index="26" nillable="true" ma:displayName="Time" ma:format="DateTime" ma:internalName="Time">
+      <xsd:simpleType>
+        <xsd:restriction base="dms:DateTime"/>
+      </xsd:simpleType>
+    </xsd:element>
+    <xsd:element name="MediaServiceSearchProperties" ma:index="27" nillable="true" ma:displayName="MediaServiceSearchProperties" ma:hidden="true" ma:internalName="MediaServiceSearchProperties" ma:readOnly="true">
+      <xsd:simpleType>
+        <xsd:restriction base="dms:Note"/>
+      </xsd:simpleType>
+    </xsd:element>
+    <xsd:element name="MediaServiceObjectDetectorVersions" ma:index="28" nillable="true" ma:displayName="MediaServiceObjectDetectorVersions" ma:description="" ma:hidden="true" ma:indexed="true" ma:internalName="MediaServiceObjectDetectorVersions" ma:readOnly="true">
+      <xsd:simpleType>
+        <xsd:restriction base="dms:Text"/>
+      </xsd:simpleType>
+    </xsd:element>
+    <xsd:element name="TranslatedLang" ma:index="29" nillable="true" ma:displayName="Translated Language" ma:hidden="true" ma:internalName="TranslatedLang" ma:readOnly="true">
+      <xsd:simpleType>
+        <xsd:restriction base="dms:Text"/>
+      </xsd:simpleType>
+    </xsd:element>
+    <xsd:element name="content" ma:index="30" nillable="true" ma:displayName="content" ma:format="Dropdown" ma:internalName="content">
+      <xsd:simpleType>
+        <xsd:restriction base="dms:Choice">
+          <xsd:enumeration value="Visual Studio"/>
+          <xsd:enumeration value="VS Code"/>
+          <xsd:enumeration value="GitHub Copilot"/>
+          <xsd:enumeration value="Dev Box"/>
+          <xsd:enumeration value="Choice 5"/>
+        </xsd:restriction>
+      </xsd:simpleType>
+    </xsd:element>
+    <xsd:element name="MediaServiceDocTags" ma:index="31" nillable="true" ma:displayName="MediaServiceDocTags" ma:hidden="true" ma:internalName="MediaServiceDocTags" ma:readOnly="true">
+      <xsd:simpleType>
+        <xsd:restriction base="dms:Note"/>
+      </xsd:simpleType>
+    </xsd:element>
+    <xsd:element name="MediaServiceBillingMetadata" ma:index="32" nillable="true" ma:displayName="MediaServiceBillingMetadata" ma:hidden="true" ma:internalName="MediaServiceBillingMetadata" ma:readOnly="true">
+      <xsd:simpleType>
+        <xsd:restriction base="dms:Text"/>
+      </xsd:simpleType>
+    </xsd:element>
+  </xsd:schema>
+  <xsd:schema xmlns:xsd="http://www.w3.org/2001/XMLSchema" xmlns:xs="http://www.w3.org/2001/XMLSchema" xmlns:dms="http://schemas.microsoft.com/office/2006/documentManagement/types" xmlns:pc="http://schemas.microsoft.com/office/infopath/2007/PartnerControls" targetNamespace="913b567d-4c83-4181-a45c-f04ce7e1b72e" elementFormDefault="qualified">
+    <xsd:import namespace="http://schemas.microsoft.com/office/2006/documentManagement/types"/>
+    <xsd:import namespace="http://schemas.microsoft.com/office/infopath/2007/PartnerControls"/>
+    <xsd:element name="SharedWithUsers" ma:index="11" nillable="true" ma:displayName="Shared With" ma:hidden="true" ma:internalName="SharedWithUsers" ma:readOnly="true">
+      <xsd:complexType>
+        <xsd:complexContent>
+          <xsd:extension base="dms:UserMulti">
+            <xsd:sequence>
+              <xsd:element name="UserInfo" minOccurs="0" maxOccurs="unbounded">
+                <xsd:complexType>
+                  <xsd:sequence>
+                    <xsd:element name="DisplayName" type="xsd:string" minOccurs="0"/>
+                    <xsd:element name="AccountId" type="dms:UserId" minOccurs="0" nillable="true"/>
+                    <xsd:element name="AccountType" type="xsd:string" minOccurs="0"/>
+                  </xsd:sequence>
+                </xsd:complexType>
+              </xsd:element>
+            </xsd:sequence>
+          </xsd:extension>
+        </xsd:complexContent>
+      </xsd:complexType>
+    </xsd:element>
+    <xsd:element name="SharedWithDetails" ma:index="12" nillable="true" ma:displayName="Shared With Details" ma:hidden="true" ma:internalName="SharedWithDetails" ma:readOnly="true">
+      <xsd:simpleType>
+        <xsd:restriction base="dms:Note"/>
+      </xsd:simpleType>
+    </xsd:element>
+  </xsd:schema>
+  <xsd:schema xmlns:xsd="http://www.w3.org/2001/XMLSchema" xmlns:xs="http://www.w3.org/2001/XMLSchema" xmlns:dms="http://schemas.microsoft.com/office/2006/documentManagement/types" xmlns:pc="http://schemas.microsoft.com/office/infopath/2007/PartnerControls" targetNamespace="230e9df3-be65-4c73-a93b-d1236ebd677e" elementFormDefault="qualified">
+    <xsd:import namespace="http://schemas.microsoft.com/office/2006/documentManagement/types"/>
+    <xsd:import namespace="http://schemas.microsoft.com/office/infopath/2007/PartnerControls"/>
+    <xsd:element name="TaxCatchAll" ma:index="25" nillable="true" ma:displayName="Taxonomy Catch All Column" ma:hidden="true" ma:list="{ae7d3c4e-66c4-4603-a26b-8d6b1e039262}" ma:internalName="TaxCatchAll" ma:showField="CatchAllData" ma:web="913b567d-4c83-4181-a45c-f04ce7e1b72e">
+      <xsd:complexType>
+        <xsd:complexContent>
+          <xsd:extension base="dms:MultiChoiceLookup">
+            <xsd:sequence>
+              <xsd:element name="Value" type="dms:Lookup" maxOccurs="unbounded" minOccurs="0" nillable="true"/>
+            </xsd:sequence>
+          </xsd:extension>
+        </xsd:complexContent>
+      </xsd:complexType>
+    </xsd:element>
+  </xsd:schema>
+  <xsd:schema xmlns="http://schemas.openxmlformats.org/package/2006/metadata/core-properties" xmlns:xsd="http://www.w3.org/2001/XMLSchema" xmlns:xsi="http://www.w3.org/2001/XMLSchema-instance" xmlns:dc="http://purl.org/dc/elements/1.1/" xmlns:dcterms="http://purl.org/dc/terms/" xmlns:odoc="http://schemas.microsoft.com/internal/obd" targetNamespace="http://schemas.openxmlformats.org/package/2006/metadata/core-properties" elementFormDefault="qualified" attributeFormDefault="unqualified" blockDefault="#all">
+    <xsd:import namespace="http://purl.org/dc/elements/1.1/" schemaLocation="http://dublincore.org/schemas/xmls/qdc/2003/04/02/dc.xsd"/>
+    <xsd:import namespace="http://purl.org/dc/terms/" schemaLocation="http://dublincore.org/schemas/xmls/qdc/2003/04/02/dcterms.xsd"/>
+    <xsd:element name="coreProperties" type="CT_coreProperties"/>
+    <xsd:complexType name="CT_coreProperties">
+      <xsd:all>
+        <xsd:element ref="dc:creator" minOccurs="0" maxOccurs="1"/>
+        <xsd:element ref="dcterms:created" minOccurs="0" maxOccurs="1"/>
+        <xsd:element ref="dc:identifier" minOccurs="0" maxOccurs="1"/>
+        <xsd:element name="contentType" minOccurs="0" maxOccurs="1" type="xsd:string" ma:displayName="Content Type"/>
+        <xsd:element ref="dc:title" minOccurs="0" maxOccurs="1" ma:index="1" ma:displayName="Title"/>
+        <xsd:element ref="dc:subject" minOccurs="0" maxOccurs="1"/>
+        <xsd:element ref="dc:description" minOccurs="0" maxOccurs="1"/>
+        <xsd:element name="keywords" minOccurs="0" maxOccurs="1" type="xsd:string"/>
+        <xsd:element ref="dc:language" minOccurs="0" maxOccurs="1"/>
+        <xsd:element name="category" minOccurs="0" maxOccurs="1" type="xsd:string"/>
+        <xsd:element name="version" minOccurs="0" maxOccurs="1" type="xsd:string"/>
+        <xsd:element name="revision" minOccurs="0" maxOccurs="1" type="xsd:string">
+          <xsd:annotation>
+            <xsd:documentation>
+                        This value indicates the number of saves or revisions. The application is responsible for updating this value after each revision.
+                    </xsd:documentation>
+          </xsd:annotation>
+        </xsd:element>
+        <xsd:element name="lastModifiedBy" minOccurs="0" maxOccurs="1" type="xsd:string"/>
+        <xsd:element ref="dcterms:modified" minOccurs="0" maxOccurs="1"/>
+        <xsd:element name="contentStatus" minOccurs="0" maxOccurs="1" type="xsd:string"/>
+      </xsd:all>
+    </xsd:complexType>
+  </xsd:schema>
+  <xs:schema xmlns:pc="http://schemas.microsoft.com/office/infopath/2007/PartnerControls" xmlns:xs="http://www.w3.org/2001/XMLSchema" targetNamespace="http://schemas.microsoft.com/office/infopath/2007/PartnerControls" elementFormDefault="qualified" attributeFormDefault="unqualified">
+    <xs:element name="Person">
+      <xs:complexType>
+        <xs:sequence>
+          <xs:element ref="pc:DisplayName" minOccurs="0"/>
+          <xs:element ref="pc:AccountId" minOccurs="0"/>
+          <xs:element ref="pc:AccountType" minOccurs="0"/>
+        </xs:sequence>
+      </xs:complexType>
+    </xs:element>
+    <xs:element name="DisplayName" type="xs:string"/>
+    <xs:element name="AccountId" type="xs:string"/>
+    <xs:element name="AccountType" type="xs:string"/>
+    <xs:element name="BDCAssociatedEntity">
+      <xs:complexType>
+        <xs:sequence>
+          <xs:element ref="pc:BDCEntity" minOccurs="0" maxOccurs="unbounded"/>
+        </xs:sequence>
+        <xs:attribute ref="pc:EntityNamespace"/>
+        <xs:attribute ref="pc:EntityName"/>
+        <xs:attribute ref="pc:SystemInstanceName"/>
+        <xs:attribute ref="pc:AssociationName"/>
+      </xs:complexType>
+    </xs:element>
+    <xs:attribute name="EntityNamespace" type="xs:string"/>
+    <xs:attribute name="EntityName" type="xs:string"/>
+    <xs:attribute name="SystemInstanceName" type="xs:string"/>
+    <xs:attribute name="AssociationName" type="xs:string"/>
+    <xs:element name="BDCEntity">
+      <xs:complexType>
+        <xs:sequence>
+          <xs:element ref="pc:EntityDisplayName" minOccurs="0"/>
+          <xs:element ref="pc:EntityInstanceReference" minOccurs="0"/>
+          <xs:element ref="pc:EntityId1" minOccurs="0"/>
+          <xs:element ref="pc:EntityId2" minOccurs="0"/>
+          <xs:element ref="pc:EntityId3" minOccurs="0"/>
+          <xs:element ref="pc:EntityId4" minOccurs="0"/>
+          <xs:element ref="pc:EntityId5" minOccurs="0"/>
+        </xs:sequence>
+      </xs:complexType>
+    </xs:element>
+    <xs:element name="EntityDisplayName" type="xs:string"/>
+    <xs:element name="EntityInstanceReference" type="xs:string"/>
+    <xs:element name="EntityId1" type="xs:string"/>
+    <xs:element name="EntityId2" type="xs:string"/>
+    <xs:element name="EntityId3" type="xs:string"/>
+    <xs:element name="EntityId4" type="xs:string"/>
+    <xs:element name="EntityId5" type="xs:string"/>
+    <xs:element name="Terms">
+      <xs:complexType>
+        <xs:sequence>
+          <xs:element ref="pc:TermInfo" minOccurs="0" maxOccurs="unbounded"/>
+        </xs:sequence>
+      </xs:complexType>
+    </xs:element>
+    <xs:element name="TermInfo">
+      <xs:complexType>
+        <xs:sequence>
+          <xs:element ref="pc:TermName" minOccurs="0"/>
+          <xs:element ref="pc:TermId" minOccurs="0"/>
+        </xs:sequence>
+      </xs:complexType>
+    </xs:element>
+    <xs:element name="TermName" type="xs:string"/>
+    <xs:element name="TermId" type="xs:string"/>
+  </xs:schema>
+</ct:contentTypeSchema>
+</file>
+
+<file path=customXml/itemProps1.xml><?xml version="1.0" encoding="utf-8"?>
+<ds:datastoreItem xmlns:ds="http://schemas.openxmlformats.org/officeDocument/2006/customXml" ds:itemID="{97BDA820-30C0-4D9F-8489-BC57A9B4C6C1}">
+  <ds:schemaRefs>
+    <ds:schemaRef ds:uri="http://purl.org/dc/dcmitype/"/>
+    <ds:schemaRef ds:uri="http://schemas.microsoft.com/office/infopath/2007/PartnerControls"/>
+    <ds:schemaRef ds:uri="http://schemas.microsoft.com/office/2006/documentManagement/types"/>
+    <ds:schemaRef ds:uri="913b567d-4c83-4181-a45c-f04ce7e1b72e"/>
+    <ds:schemaRef ds:uri="http://schemas.openxmlformats.org/package/2006/metadata/core-properties"/>
+    <ds:schemaRef ds:uri="http://purl.org/dc/elements/1.1/"/>
+    <ds:schemaRef ds:uri="http://schemas.microsoft.com/office/2006/metadata/properties"/>
+    <ds:schemaRef ds:uri="230e9df3-be65-4c73-a93b-d1236ebd677e"/>
+    <ds:schemaRef ds:uri="http://purl.org/dc/terms/"/>
+    <ds:schemaRef ds:uri="804751ba-60e0-4191-9865-d7e5284c1d69"/>
+    <ds:schemaRef ds:uri="http://schemas.microsoft.com/sharepoint/v3"/>
+    <ds:schemaRef ds:uri="http://www.w3.org/XML/1998/namespace"/>
+  </ds:schemaRefs>
+</ds:datastoreItem>
+</file>
+
+<file path=customXml/itemProps2.xml><?xml version="1.0" encoding="utf-8"?>
+<ds:datastoreItem xmlns:ds="http://schemas.openxmlformats.org/officeDocument/2006/customXml" ds:itemID="{EF9257C1-DA2E-4D15-9ED2-522580AE872C}">
+  <ds:schemaRefs>
+    <ds:schemaRef ds:uri="http://schemas.microsoft.com/sharepoint/v3/contenttype/forms"/>
+  </ds:schemaRefs>
+</ds:datastoreItem>
+</file>
+
+<file path=customXml/itemProps3.xml><?xml version="1.0" encoding="utf-8"?>
+<ds:datastoreItem xmlns:ds="http://schemas.openxmlformats.org/officeDocument/2006/customXml" ds:itemID="{B8B2AE3B-9ECC-455B-99BA-9B424CF2E7A0}">
+  <ds:schemaRefs>
+    <ds:schemaRef ds:uri="http://schemas.microsoft.com/office/2006/metadata/contentType"/>
+    <ds:schemaRef ds:uri="http://schemas.microsoft.com/office/2006/metadata/properties/metaAttributes"/>
+    <ds:schemaRef ds:uri="http://www.w3.org/2001/XMLSchema"/>
+    <ds:schemaRef ds:uri="http://schemas.microsoft.com/office/2006/metadata/properties"/>
+    <ds:schemaRef ds:uri="http://schemas.microsoft.com/sharepoint/v3"/>
+    <ds:schemaRef ds:uri="804751ba-60e0-4191-9865-d7e5284c1d69"/>
+    <ds:schemaRef ds:uri="913b567d-4c83-4181-a45c-f04ce7e1b72e"/>
+    <ds:schemaRef ds:uri="230e9df3-be65-4c73-a93b-d1236ebd677e"/>
+    <ds:schemaRef ds:uri="http://schemas.microsoft.com/office/2006/documentManagement/types"/>
+    <ds:schemaRef ds:uri="http://schemas.microsoft.com/office/infopath/2007/PartnerControls"/>
+    <ds:schemaRef ds:uri="http://schemas.openxmlformats.org/package/2006/metadata/core-properties"/>
+    <ds:schemaRef ds:uri="http://purl.org/dc/elements/1.1/"/>
+    <ds:schemaRef ds:uri="http://purl.org/dc/terms/"/>
+    <ds:schemaRef ds:uri="http://schemas.microsoft.com/internal/obd"/>
+  </ds:schemaRefs>
+</ds:datastoreItem>
+</file>
+
 <file path=docMetadata/LabelInfo.xml><?xml version="1.0" encoding="utf-8"?>
 <clbl:labelList xmlns:clbl="http://schemas.microsoft.com/office/2020/mipLabelMetadata">
-  <clbl:label id="{f42aa342-8706-4288-bd11-ebb85995028c}" enabled="1" method="Standard" siteId="{72f988bf-86f1-41af-91ab-2d7cd011db47}" contentBits="0" removed="0"/>
+  <clbl:label id="{1a19d03a-48bc-4359-8038-5b5f6d5847c3}" enabled="1" method="Standard" siteId="{72f988bf-86f1-41af-91ab-2d7cd011db47}" removed="0"/>
 </clbl:labelList>
 </file>
--- a/delivery-resources/ILL335-Train-the-Trainer-FY27.pptx
+++ b/delivery-resources/ILL335-Train-the-Trainer-FY27.pptx
@@ -4,6 +4,9 @@
   <p:sldMasterIdLst>
     <p:sldMasterId id="2147483648" r:id="rId4"/>
   </p:sldMasterIdLst>
+  <p:notesMasterIdLst>
+    <p:notesMasterId r:id="rId19"/>
+  </p:notesMasterIdLst>
   <p:sldIdLst>
     <p:sldId id="2147479540" r:id="rId5"/>
     <p:sldId id="2147479558" r:id="rId6"/>
@@ -136,55 +139,2171 @@
 </p:presentation>
 </file>
 
-<file path=ppt/changesInfos/changesInfo1.xml><?xml version="1.0" encoding="utf-8"?>
-<pc:chgInfo xmlns:a="http://schemas.openxmlformats.org/drawingml/2006/main" xmlns:r="http://schemas.openxmlformats.org/officeDocument/2006/relationships" xmlns:ac="http://schemas.microsoft.com/office/drawing/2013/main/command" xmlns:pc="http://schemas.microsoft.com/office/powerpoint/2013/main/command">
-  <pc:docChgLst>
-    <pc:chgData name="Daniela Siorek (SYNAXIS CORPORATION)" userId="622c6b35-66dd-425f-b550-df480cf6e77c" providerId="ADAL" clId="{9AD8B92E-9B58-4964-B865-EFE46FB138AA}"/>
-    <pc:docChg chg="delSld modSld">
-      <pc:chgData name="Daniela Siorek (SYNAXIS CORPORATION)" userId="622c6b35-66dd-425f-b550-df480cf6e77c" providerId="ADAL" clId="{9AD8B92E-9B58-4964-B865-EFE46FB138AA}" dt="2026-09-08T18:09:35.374" v="9" actId="47"/>
-      <pc:docMkLst>
-        <pc:docMk/>
-      </pc:docMkLst>
-      <pc:sldChg chg="del">
-        <pc:chgData name="Daniela Siorek (SYNAXIS CORPORATION)" userId="622c6b35-66dd-425f-b550-df480cf6e77c" providerId="ADAL" clId="{9AD8B92E-9B58-4964-B865-EFE46FB138AA}" dt="2026-09-08T18:09:35.374" v="9" actId="47"/>
-        <pc:sldMkLst>
-          <pc:docMk/>
-          <pc:sldMk cId="4061082036" sldId="2147479528"/>
-        </pc:sldMkLst>
-      </pc:sldChg>
-      <pc:sldChg chg="modSp mod">
-        <pc:chgData name="Daniela Siorek (SYNAXIS CORPORATION)" userId="622c6b35-66dd-425f-b550-df480cf6e77c" providerId="ADAL" clId="{9AD8B92E-9B58-4964-B865-EFE46FB138AA}" dt="2026-09-08T18:09:13.681" v="8" actId="14100"/>
-        <pc:sldMkLst>
-          <pc:docMk/>
-          <pc:sldMk cId="143569297" sldId="2147479558"/>
-        </pc:sldMkLst>
-        <pc:spChg chg="mod">
-          <ac:chgData name="Daniela Siorek (SYNAXIS CORPORATION)" userId="622c6b35-66dd-425f-b550-df480cf6e77c" providerId="ADAL" clId="{9AD8B92E-9B58-4964-B865-EFE46FB138AA}" dt="2026-09-08T18:09:13.681" v="8" actId="14100"/>
-          <ac:spMkLst>
-            <pc:docMk/>
-            <pc:sldMk cId="143569297" sldId="2147479558"/>
-            <ac:spMk id="3" creationId="{13AA93F6-0237-907D-C0B7-ACABF04C7E9B}"/>
-          </ac:spMkLst>
-        </pc:spChg>
-      </pc:sldChg>
-      <pc:sldMasterChg chg="delSldLayout">
-        <pc:chgData name="Daniela Siorek (SYNAXIS CORPORATION)" userId="622c6b35-66dd-425f-b550-df480cf6e77c" providerId="ADAL" clId="{9AD8B92E-9B58-4964-B865-EFE46FB138AA}" dt="2026-09-08T18:09:35.374" v="9" actId="47"/>
-        <pc:sldMasterMkLst>
-          <pc:docMk/>
-          <pc:sldMasterMk cId="2209977519" sldId="2147483648"/>
-        </pc:sldMasterMkLst>
-        <pc:sldLayoutChg chg="del">
-          <pc:chgData name="Daniela Siorek (SYNAXIS CORPORATION)" userId="622c6b35-66dd-425f-b550-df480cf6e77c" providerId="ADAL" clId="{9AD8B92E-9B58-4964-B865-EFE46FB138AA}" dt="2026-09-08T18:09:35.374" v="9" actId="47"/>
-          <pc:sldLayoutMkLst>
-            <pc:docMk/>
-            <pc:sldMasterMk cId="2209977519" sldId="2147483648"/>
-            <pc:sldLayoutMk cId="437009877" sldId="2147483660"/>
-          </pc:sldLayoutMkLst>
-        </pc:sldLayoutChg>
-      </pc:sldMasterChg>
-    </pc:docChg>
-  </pc:docChgLst>
-</pc:chgInfo>
+<file path=ppt/notesMasters/notesMaster1.xml><?xml version="1.0" encoding="utf-8"?>
+<p:notesMaster xmlns:a="http://schemas.openxmlformats.org/drawingml/2006/main" xmlns:r="http://schemas.openxmlformats.org/officeDocument/2006/relationships" xmlns:p="http://schemas.openxmlformats.org/presentationml/2006/main">
+  <p:cSld>
+    <p:bg>
+      <p:bgRef idx="1001">
+        <a:schemeClr val="bg1"/>
+      </p:bgRef>
+    </p:bg>
+    <p:spTree>
+      <p:nvGrpSpPr>
+        <p:cNvPr id="1" name=""/>
+        <p:cNvGrpSpPr/>
+        <p:nvPr/>
+      </p:nvGrpSpPr>
+      <p:grpSpPr>
+        <a:xfrm>
+          <a:off x="0" y="0"/>
+          <a:ext cx="0" cy="0"/>
+          <a:chOff x="0" y="0"/>
+          <a:chExt cx="0" cy="0"/>
+        </a:xfrm>
+      </p:grpSpPr>
+      <p:sp>
+        <p:nvSpPr>
+          <p:cNvPr id="2" name="Header Placeholder 1"/>
+          <p:cNvSpPr>
+            <a:spLocks noGrp="1"/>
+          </p:cNvSpPr>
+          <p:nvPr>
+            <p:ph type="hdr" sz="quarter"/>
+          </p:nvPr>
+        </p:nvSpPr>
+        <p:spPr>
+          <a:xfrm>
+            <a:off x="0" y="0"/>
+            <a:ext cx="2971800" cy="458788"/>
+          </a:xfrm>
+          <a:prstGeom prst="rect">
+            <a:avLst/>
+          </a:prstGeom>
+        </p:spPr>
+        <p:txBody>
+          <a:bodyPr vert="horz" lIns="91440" tIns="45720" rIns="91440" bIns="45720" rtlCol="0"/>
+          <a:lstStyle>
+            <a:lvl1pPr algn="l">
+              <a:defRPr sz="1200"/>
+            </a:lvl1pPr>
+          </a:lstStyle>
+          <a:p>
+            <a:endParaRPr lang="en-US"/>
+          </a:p>
+        </p:txBody>
+      </p:sp>
+      <p:sp>
+        <p:nvSpPr>
+          <p:cNvPr id="3" name="Date Placeholder 2"/>
+          <p:cNvSpPr>
+            <a:spLocks noGrp="1"/>
+          </p:cNvSpPr>
+          <p:nvPr>
+            <p:ph type="dt" idx="1"/>
+          </p:nvPr>
+        </p:nvSpPr>
+        <p:spPr>
+          <a:xfrm>
+            <a:off x="3884613" y="0"/>
+            <a:ext cx="2971800" cy="458788"/>
+          </a:xfrm>
+          <a:prstGeom prst="rect">
+            <a:avLst/>
+          </a:prstGeom>
+        </p:spPr>
+        <p:txBody>
+          <a:bodyPr vert="horz" lIns="91440" tIns="45720" rIns="91440" bIns="45720" rtlCol="0"/>
+          <a:lstStyle>
+            <a:lvl1pPr algn="r">
+              <a:defRPr sz="1200"/>
+            </a:lvl1pPr>
+          </a:lstStyle>
+          <a:p>
+            <a:fld id="{AB652F22-1BD7-4384-B32C-7D8B67EF3584}" type="datetimeFigureOut">
+              <a:rPr lang="en-US" smtClean="0"/>
+              <a:t>9/10/2026</a:t>
+            </a:fld>
+            <a:endParaRPr lang="en-US"/>
+          </a:p>
+        </p:txBody>
+      </p:sp>
+      <p:sp>
+        <p:nvSpPr>
+          <p:cNvPr id="4" name="Slide Image Placeholder 3"/>
+          <p:cNvSpPr>
+            <a:spLocks noGrp="1" noRot="1" noChangeAspect="1"/>
+          </p:cNvSpPr>
+          <p:nvPr>
+            <p:ph type="sldImg" idx="2"/>
+          </p:nvPr>
+        </p:nvSpPr>
+        <p:spPr>
+          <a:xfrm>
+            <a:off x="685800" y="1143000"/>
+            <a:ext cx="5486400" cy="3086100"/>
+          </a:xfrm>
+          <a:prstGeom prst="rect">
+            <a:avLst/>
+          </a:prstGeom>
+          <a:noFill/>
+          <a:ln w="12700">
+            <a:solidFill>
+              <a:prstClr val="black"/>
+            </a:solidFill>
+          </a:ln>
+        </p:spPr>
+        <p:txBody>
+          <a:bodyPr vert="horz" lIns="91440" tIns="45720" rIns="91440" bIns="45720" rtlCol="0" anchor="ctr"/>
+          <a:lstStyle/>
+          <a:p>
+            <a:endParaRPr lang="en-US"/>
+          </a:p>
+        </p:txBody>
+      </p:sp>
+      <p:sp>
+        <p:nvSpPr>
+          <p:cNvPr id="5" name="Notes Placeholder 4"/>
+          <p:cNvSpPr>
+            <a:spLocks noGrp="1"/>
+          </p:cNvSpPr>
+          <p:nvPr>
+            <p:ph type="body" sz="quarter" idx="3"/>
+          </p:nvPr>
+        </p:nvSpPr>
+        <p:spPr>
+          <a:xfrm>
+            <a:off x="685800" y="4400550"/>
+            <a:ext cx="5486400" cy="3600450"/>
+          </a:xfrm>
+          <a:prstGeom prst="rect">
+            <a:avLst/>
+          </a:prstGeom>
+        </p:spPr>
+        <p:txBody>
+          <a:bodyPr vert="horz" lIns="91440" tIns="45720" rIns="91440" bIns="45720" rtlCol="0"/>
+          <a:lstStyle/>
+          <a:p>
+            <a:pPr lvl="0"/>
+            <a:r>
+              <a:rPr lang="en-US"/>
+              <a:t>Click to edit Master text styles</a:t>
+            </a:r>
+          </a:p>
+          <a:p>
+            <a:pPr lvl="1"/>
+            <a:r>
+              <a:rPr lang="en-US"/>
+              <a:t>Second level</a:t>
+            </a:r>
+          </a:p>
+          <a:p>
+            <a:pPr lvl="2"/>
+            <a:r>
+              <a:rPr lang="en-US"/>
+              <a:t>Third level</a:t>
+            </a:r>
+          </a:p>
+          <a:p>
+            <a:pPr lvl="3"/>
+            <a:r>
+              <a:rPr lang="en-US"/>
+              <a:t>Fourth level</a:t>
+            </a:r>
+          </a:p>
+          <a:p>
+            <a:pPr lvl="4"/>
+            <a:r>
+              <a:rPr lang="en-US"/>
+              <a:t>Fifth level</a:t>
+            </a:r>
+          </a:p>
+        </p:txBody>
+      </p:sp>
+      <p:sp>
+        <p:nvSpPr>
+          <p:cNvPr id="6" name="Footer Placeholder 5"/>
+          <p:cNvSpPr>
+            <a:spLocks noGrp="1"/>
+          </p:cNvSpPr>
+          <p:nvPr>
+            <p:ph type="ftr" sz="quarter" idx="4"/>
+          </p:nvPr>
+        </p:nvSpPr>
+        <p:spPr>
+          <a:xfrm>
+            <a:off x="0" y="8685213"/>
+            <a:ext cx="2971800" cy="458787"/>
+          </a:xfrm>
+          <a:prstGeom prst="rect">
+            <a:avLst/>
+          </a:prstGeom>
+        </p:spPr>
+        <p:txBody>
+          <a:bodyPr vert="horz" lIns="91440" tIns="45720" rIns="91440" bIns="45720" rtlCol="0" anchor="b"/>
+          <a:lstStyle>
+            <a:lvl1pPr algn="l">
+              <a:defRPr sz="1200"/>
+            </a:lvl1pPr>
+          </a:lstStyle>
+          <a:p>
+            <a:endParaRPr lang="en-US"/>
+          </a:p>
+        </p:txBody>
+      </p:sp>
+      <p:sp>
+        <p:nvSpPr>
+          <p:cNvPr id="7" name="Slide Number Placeholder 6"/>
+          <p:cNvSpPr>
+            <a:spLocks noGrp="1"/>
+          </p:cNvSpPr>
+          <p:nvPr>
+            <p:ph type="sldNum" sz="quarter" idx="5"/>
+          </p:nvPr>
+        </p:nvSpPr>
+        <p:spPr>
+          <a:xfrm>
+            <a:off x="3884613" y="8685213"/>
+            <a:ext cx="2971800" cy="458787"/>
+          </a:xfrm>
+          <a:prstGeom prst="rect">
+            <a:avLst/>
+          </a:prstGeom>
+        </p:spPr>
+        <p:txBody>
+          <a:bodyPr vert="horz" lIns="91440" tIns="45720" rIns="91440" bIns="45720" rtlCol="0" anchor="b"/>
+          <a:lstStyle>
+            <a:lvl1pPr algn="r">
+              <a:defRPr sz="1200"/>
+            </a:lvl1pPr>
+          </a:lstStyle>
+          <a:p>
+            <a:fld id="{1ECCB1A9-1BC1-4440-98A0-B2D1F6D1933C}" type="slidenum">
+              <a:rPr lang="en-US" smtClean="0"/>
+              <a:t>‹#›</a:t>
+            </a:fld>
+            <a:endParaRPr lang="en-US"/>
+          </a:p>
+        </p:txBody>
+      </p:sp>
+    </p:spTree>
+    <p:extLst>
+      <p:ext uri="{BB962C8B-B14F-4D97-AF65-F5344CB8AC3E}">
+        <p14:creationId xmlns:p14="http://schemas.microsoft.com/office/powerpoint/2010/main" val="201728610"/>
+      </p:ext>
+    </p:extLst>
+  </p:cSld>
+  <p:clrMap bg1="lt1" tx1="dk1" bg2="lt2" tx2="dk2" accent1="accent1" accent2="accent2" accent3="accent3" accent4="accent4" accent5="accent5" accent6="accent6" hlink="hlink" folHlink="folHlink"/>
+  <p:notesStyle>
+    <a:lvl1pPr marL="0" algn="l" defTabSz="914400" rtl="0" eaLnBrk="1" latinLnBrk="0" hangingPunct="1">
+      <a:defRPr sz="1200" kern="1200">
+        <a:solidFill>
+          <a:schemeClr val="tx1"/>
+        </a:solidFill>
+        <a:latin typeface="+mn-lt"/>
+        <a:ea typeface="+mn-ea"/>
+        <a:cs typeface="+mn-cs"/>
+      </a:defRPr>
+    </a:lvl1pPr>
+    <a:lvl2pPr marL="457200" algn="l" defTabSz="914400" rtl="0" eaLnBrk="1" latinLnBrk="0" hangingPunct="1">
+      <a:defRPr sz="1200" kern="1200">
+        <a:solidFill>
+          <a:schemeClr val="tx1"/>
+        </a:solidFill>
+        <a:latin typeface="+mn-lt"/>
+        <a:ea typeface="+mn-ea"/>
+        <a:cs typeface="+mn-cs"/>
+      </a:defRPr>
+    </a:lvl2pPr>
+    <a:lvl3pPr marL="914400" algn="l" defTabSz="914400" rtl="0" eaLnBrk="1" latinLnBrk="0" hangingPunct="1">
+      <a:defRPr sz="1200" kern="1200">
+        <a:solidFill>
+          <a:schemeClr val="tx1"/>
+        </a:solidFill>
+        <a:latin typeface="+mn-lt"/>
+        <a:ea typeface="+mn-ea"/>
+        <a:cs typeface="+mn-cs"/>
+      </a:defRPr>
+    </a:lvl3pPr>
+    <a:lvl4pPr marL="1371600" algn="l" defTabSz="914400" rtl="0" eaLnBrk="1" latinLnBrk="0" hangingPunct="1">
+      <a:defRPr sz="1200" kern="1200">
+        <a:solidFill>
+          <a:schemeClr val="tx1"/>
+        </a:solidFill>
+        <a:latin typeface="+mn-lt"/>
+        <a:ea typeface="+mn-ea"/>
+        <a:cs typeface="+mn-cs"/>
+      </a:defRPr>
+    </a:lvl4pPr>
+    <a:lvl5pPr marL="1828800" algn="l" defTabSz="914400" rtl="0" eaLnBrk="1" latinLnBrk="0" hangingPunct="1">
+      <a:defRPr sz="1200" kern="1200">
+        <a:solidFill>
+          <a:schemeClr val="tx1"/>
+        </a:solidFill>
+        <a:latin typeface="+mn-lt"/>
+        <a:ea typeface="+mn-ea"/>
+        <a:cs typeface="+mn-cs"/>
+      </a:defRPr>
+    </a:lvl5pPr>
+    <a:lvl6pPr marL="2286000" algn="l" defTabSz="914400" rtl="0" eaLnBrk="1" latinLnBrk="0" hangingPunct="1">
+      <a:defRPr sz="1200" kern="1200">
+        <a:solidFill>
+          <a:schemeClr val="tx1"/>
+        </a:solidFill>
+        <a:latin typeface="+mn-lt"/>
+        <a:ea typeface="+mn-ea"/>
+        <a:cs typeface="+mn-cs"/>
+      </a:defRPr>
+    </a:lvl6pPr>
+    <a:lvl7pPr marL="2743200" algn="l" defTabSz="914400" rtl="0" eaLnBrk="1" latinLnBrk="0" hangingPunct="1">
+      <a:defRPr sz="1200" kern="1200">
+        <a:solidFill>
+          <a:schemeClr val="tx1"/>
+        </a:solidFill>
+        <a:latin typeface="+mn-lt"/>
+        <a:ea typeface="+mn-ea"/>
+        <a:cs typeface="+mn-cs"/>
+      </a:defRPr>
+    </a:lvl7pPr>
+    <a:lvl8pPr marL="3200400" algn="l" defTabSz="914400" rtl="0" eaLnBrk="1" latinLnBrk="0" hangingPunct="1">
+      <a:defRPr sz="1200" kern="1200">
+        <a:solidFill>
+          <a:schemeClr val="tx1"/>
+        </a:solidFill>
+        <a:latin typeface="+mn-lt"/>
+        <a:ea typeface="+mn-ea"/>
+        <a:cs typeface="+mn-cs"/>
+      </a:defRPr>
+    </a:lvl8pPr>
+    <a:lvl9pPr marL="3657600" algn="l" defTabSz="914400" rtl="0" eaLnBrk="1" latinLnBrk="0" hangingPunct="1">
+      <a:defRPr sz="1200" kern="1200">
+        <a:solidFill>
+          <a:schemeClr val="tx1"/>
+        </a:solidFill>
+        <a:latin typeface="+mn-lt"/>
+        <a:ea typeface="+mn-ea"/>
+        <a:cs typeface="+mn-cs"/>
+      </a:defRPr>
+    </a:lvl9pPr>
+  </p:notesStyle>
+</p:notesMaster>
+</file>
+
+<file path=ppt/notesSlides/notesSlide1.xml><?xml version="1.0" encoding="utf-8"?>
+<p:notes xmlns:a="http://schemas.openxmlformats.org/drawingml/2006/main" xmlns:r="http://schemas.openxmlformats.org/officeDocument/2006/relationships" xmlns:p="http://schemas.openxmlformats.org/presentationml/2006/main">
+  <p:cSld>
+    <p:spTree>
+      <p:nvGrpSpPr>
+        <p:cNvPr id="1" name=""/>
+        <p:cNvGrpSpPr/>
+        <p:nvPr/>
+      </p:nvGrpSpPr>
+      <p:grpSpPr>
+        <a:xfrm>
+          <a:off x="0" y="0"/>
+          <a:ext cx="0" cy="0"/>
+          <a:chOff x="0" y="0"/>
+          <a:chExt cx="0" cy="0"/>
+        </a:xfrm>
+      </p:grpSpPr>
+      <p:sp>
+        <p:nvSpPr>
+          <p:cNvPr id="2" name="Slide Image Placeholder 1"/>
+          <p:cNvSpPr>
+            <a:spLocks noGrp="1" noRot="1" noChangeAspect="1"/>
+          </p:cNvSpPr>
+          <p:nvPr>
+            <p:ph type="sldImg"/>
+          </p:nvPr>
+        </p:nvSpPr>
+        <p:spPr/>
+      </p:sp>
+      <p:sp>
+        <p:nvSpPr>
+          <p:cNvPr id="3" name="Notes Placeholder 2"/>
+          <p:cNvSpPr>
+            <a:spLocks noGrp="1"/>
+          </p:cNvSpPr>
+          <p:nvPr>
+            <p:ph type="body" idx="1"/>
+          </p:nvPr>
+        </p:nvSpPr>
+        <p:spPr/>
+        <p:txBody>
+          <a:bodyPr/>
+          <a:lstStyle/>
+          <a:p>
+            <a:r>
+              <a:rPr lang="en-US"/>
+              <a:t>WELCOME / HOLDING SLIDE (leave up as the room fills, ~1 min)</a:t>
+            </a:r>
+          </a:p>
+          <a:p>
+            <a:r>
+              <a:rPr lang="en-US"/>
+              <a:t>Say: "Welcome to Microsoft AI Tour. We're in ILL335 - Building and Deploying AI Agents with Microsoft Foundry."</a:t>
+            </a:r>
+          </a:p>
+          <a:p>
+            <a:r>
+              <a:rPr lang="en-US"/>
+              <a:t>Housekeeping while people settle: confirm everyone can see the screen, point out where the Skillable lab panel lives, and ask them not to start clicking ahead.</a:t>
+            </a:r>
+          </a:p>
+          <a:p>
+            <a:r>
+              <a:rPr lang="en-US"/>
+              <a:t>Check before you begin: projector readable at the back, browser clean (no personal tabs, no bookmarks bar with internal links), notifications silenced, and your .env file closed.</a:t>
+            </a:r>
+          </a:p>
+          <a:p>
+            <a:r>
+              <a:rPr lang="en-US"/>
+              <a:t>Transition: "Let's talk about what you'll be able to do by the end of this session."</a:t>
+            </a:r>
+          </a:p>
+        </p:txBody>
+      </p:sp>
+      <p:sp>
+        <p:nvSpPr>
+          <p:cNvPr id="4" name="Slide Number Placeholder 3"/>
+          <p:cNvSpPr>
+            <a:spLocks noGrp="1"/>
+          </p:cNvSpPr>
+          <p:nvPr>
+            <p:ph type="sldNum" sz="quarter" idx="5"/>
+          </p:nvPr>
+        </p:nvSpPr>
+        <p:spPr/>
+        <p:txBody>
+          <a:bodyPr/>
+          <a:lstStyle/>
+          <a:p>
+            <a:fld id="{1ECCB1A9-1BC1-4440-98A0-B2D1F6D1933C}" type="slidenum">
+              <a:rPr lang="en-US" smtClean="0"/>
+              <a:t>1</a:t>
+            </a:fld>
+            <a:endParaRPr lang="en-US"/>
+          </a:p>
+        </p:txBody>
+      </p:sp>
+    </p:spTree>
+    <p:extLst>
+      <p:ext uri="{BB962C8B-B14F-4D97-AF65-F5344CB8AC3E}">
+        <p14:creationId xmlns:p14="http://schemas.microsoft.com/office/powerpoint/2010/main" val="3567374196"/>
+      </p:ext>
+    </p:extLst>
+  </p:cSld>
+  <p:clrMapOvr>
+    <a:masterClrMapping/>
+  </p:clrMapOvr>
+</p:notes>
+</file>
+
+<file path=ppt/notesSlides/notesSlide10.xml><?xml version="1.0" encoding="utf-8"?>
+<p:notes xmlns:a="http://schemas.openxmlformats.org/drawingml/2006/main" xmlns:r="http://schemas.openxmlformats.org/officeDocument/2006/relationships" xmlns:p="http://schemas.openxmlformats.org/presentationml/2006/main">
+  <p:cSld>
+    <p:spTree>
+      <p:nvGrpSpPr>
+        <p:cNvPr id="1" name=""/>
+        <p:cNvGrpSpPr/>
+        <p:nvPr/>
+      </p:nvGrpSpPr>
+      <p:grpSpPr>
+        <a:xfrm>
+          <a:off x="0" y="0"/>
+          <a:ext cx="0" cy="0"/>
+          <a:chOff x="0" y="0"/>
+          <a:chExt cx="0" cy="0"/>
+        </a:xfrm>
+      </p:grpSpPr>
+      <p:sp>
+        <p:nvSpPr>
+          <p:cNvPr id="2" name="Slide Image Placeholder 1"/>
+          <p:cNvSpPr>
+            <a:spLocks noGrp="1" noRot="1" noChangeAspect="1"/>
+          </p:cNvSpPr>
+          <p:nvPr>
+            <p:ph type="sldImg"/>
+          </p:nvPr>
+        </p:nvSpPr>
+        <p:spPr/>
+      </p:sp>
+      <p:sp>
+        <p:nvSpPr>
+          <p:cNvPr id="3" name="Notes Placeholder 2"/>
+          <p:cNvSpPr>
+            <a:spLocks noGrp="1"/>
+          </p:cNvSpPr>
+          <p:nvPr>
+            <p:ph type="body" idx="1"/>
+          </p:nvPr>
+        </p:nvSpPr>
+        <p:spPr/>
+        <p:txBody>
+          <a:bodyPr/>
+          <a:lstStyle/>
+          <a:p>
+            <a:r>
+              <a:rPr lang="en-US"/>
+              <a:t>THE SAFETY POINT YOU MUST NOT SKIP (~3 min - deliver this even if you are behind)</a:t>
+            </a:r>
+          </a:p>
+          <a:p>
+            <a:r>
+              <a:rPr lang="en-US"/>
+              <a:t>Core statement: sentiment and regulated review are independent signals. A glowing positive comment can still require human review; an angry comment may not.</a:t>
+            </a:r>
+          </a:p>
+          <a:p>
+            <a:r>
+              <a:rPr lang="en-US"/>
+              <a:t>What the model supplies: sentiment, confidence, topics, review_category, summary.</a:t>
+            </a:r>
+          </a:p>
+          <a:p>
+            <a:r>
+              <a:rPr lang="en-US"/>
+              <a:t>What the code decides: whether it goes to human review, to a dashboard, to a second look, or to the fallback path when JSON is malformed.</a:t>
+            </a:r>
+          </a:p>
+          <a:p>
+            <a:r>
+              <a:rPr lang="en-US"/>
+              <a:t>What we never claim: causality, seriousness, diagnosis, or treatment advice. The system surfaces signals for people - it does not make regulated determinations.</a:t>
+            </a:r>
+          </a:p>
+          <a:p>
+            <a:r>
+              <a:rPr lang="en-US"/>
+              <a:t>Delivery tip: pause here. Ask the room, "If sentiment is positive and review_category is set, what happens?" The answer is human review - the two are independent.</a:t>
+            </a:r>
+          </a:p>
+          <a:p>
+            <a:r>
+              <a:rPr lang="en-US"/>
+              <a:t>If you are out of time everywhere else, deliver this slide anyway. It is the responsible-AI spine of the session.</a:t>
+            </a:r>
+          </a:p>
+          <a:p>
+            <a:r>
+              <a:rPr lang="en-US"/>
+              <a:t>Transition: "Now we prove it locally, then ship it."</a:t>
+            </a:r>
+          </a:p>
+        </p:txBody>
+      </p:sp>
+      <p:sp>
+        <p:nvSpPr>
+          <p:cNvPr id="4" name="Slide Number Placeholder 3"/>
+          <p:cNvSpPr>
+            <a:spLocks noGrp="1"/>
+          </p:cNvSpPr>
+          <p:nvPr>
+            <p:ph type="sldNum" sz="quarter" idx="5"/>
+          </p:nvPr>
+        </p:nvSpPr>
+        <p:spPr/>
+        <p:txBody>
+          <a:bodyPr/>
+          <a:lstStyle/>
+          <a:p>
+            <a:fld id="{1ECCB1A9-1BC1-4440-98A0-B2D1F6D1933C}" type="slidenum">
+              <a:rPr lang="en-US" smtClean="0"/>
+              <a:t>10</a:t>
+            </a:fld>
+            <a:endParaRPr lang="en-US"/>
+          </a:p>
+        </p:txBody>
+      </p:sp>
+    </p:spTree>
+    <p:extLst>
+      <p:ext uri="{BB962C8B-B14F-4D97-AF65-F5344CB8AC3E}">
+        <p14:creationId xmlns:p14="http://schemas.microsoft.com/office/powerpoint/2010/main" val="693292834"/>
+      </p:ext>
+    </p:extLst>
+  </p:cSld>
+  <p:clrMapOvr>
+    <a:masterClrMapping/>
+  </p:clrMapOvr>
+</p:notes>
+</file>
+
+<file path=ppt/notesSlides/notesSlide11.xml><?xml version="1.0" encoding="utf-8"?>
+<p:notes xmlns:a="http://schemas.openxmlformats.org/drawingml/2006/main" xmlns:r="http://schemas.openxmlformats.org/officeDocument/2006/relationships" xmlns:p="http://schemas.openxmlformats.org/presentationml/2006/main">
+  <p:cSld>
+    <p:spTree>
+      <p:nvGrpSpPr>
+        <p:cNvPr id="1" name=""/>
+        <p:cNvGrpSpPr/>
+        <p:nvPr/>
+      </p:nvGrpSpPr>
+      <p:grpSpPr>
+        <a:xfrm>
+          <a:off x="0" y="0"/>
+          <a:ext cx="0" cy="0"/>
+          <a:chOff x="0" y="0"/>
+          <a:chExt cx="0" cy="0"/>
+        </a:xfrm>
+      </p:grpSpPr>
+      <p:sp>
+        <p:nvSpPr>
+          <p:cNvPr id="2" name="Slide Image Placeholder 1"/>
+          <p:cNvSpPr>
+            <a:spLocks noGrp="1" noRot="1" noChangeAspect="1"/>
+          </p:cNvSpPr>
+          <p:nvPr>
+            <p:ph type="sldImg"/>
+          </p:nvPr>
+        </p:nvSpPr>
+        <p:spPr/>
+      </p:sp>
+      <p:sp>
+        <p:nvSpPr>
+          <p:cNvPr id="3" name="Notes Placeholder 2"/>
+          <p:cNvSpPr>
+            <a:spLocks noGrp="1"/>
+          </p:cNvSpPr>
+          <p:nvPr>
+            <p:ph type="body" idx="1"/>
+          </p:nvPr>
+        </p:nvSpPr>
+        <p:spPr/>
+        <p:txBody>
+          <a:bodyPr/>
+          <a:lstStyle/>
+          <a:p>
+            <a:r>
+              <a:rPr lang="en-US"/>
+              <a:t>LAB 6: LOCAL PROOF, THEN CLOUD (~20 min)</a:t>
+            </a:r>
+          </a:p>
+          <a:p>
+            <a:r>
+              <a:rPr lang="en-US"/>
+              <a:t>Frame it as direct-code deployment through the unified root azure.yaml - the same Python source runs locally and hosted.</a:t>
+            </a:r>
+          </a:p>
+          <a:p>
+            <a:r>
+              <a:rPr lang="en-US"/>
+              <a:t>Five steps:</a:t>
+            </a:r>
+          </a:p>
+          <a:p>
+            <a:r>
+              <a:rPr lang="en-US"/>
+              <a:t>1. Inspect - FoundryChatClient and ResponsesHostServer; show where the agent surface is defined.</a:t>
+            </a:r>
+          </a:p>
+          <a:p>
+            <a:r>
+              <a:rPr lang="en-US"/>
+              <a:t>2. Test locally - F5 into Agent Inspector and confirm a valid JSON response before touching the cloud.</a:t>
+            </a:r>
+          </a:p>
+          <a:p>
+            <a:r>
+              <a:rPr lang="en-US"/>
+              <a:t>3. Deploy - azd up, first environment.</a:t>
+            </a:r>
+          </a:p>
+          <a:p>
+            <a:r>
+              <a:rPr lang="en-US"/>
+              <a:t>4. Verify - azd ai agent show, expect status: active.</a:t>
+            </a:r>
+          </a:p>
+          <a:p>
+            <a:r>
+              <a:rPr lang="en-US"/>
+              <a:t>5. Invoke - azd ai agent invoke as a remote smoke test.</a:t>
+            </a:r>
+          </a:p>
+          <a:p>
+            <a:r>
+              <a:rPr lang="en-US"/>
+              <a:t>Teaching point: local proof first. If it doesn't work in Agent Inspector, deploying will not fix it.</a:t>
+            </a:r>
+          </a:p>
+          <a:p>
+            <a:r>
+              <a:rPr lang="en-US"/>
+              <a:t>Say clearly: use azd deploy only for later code-only updates, and remind the room that cloud commands can create charges.</a:t>
+            </a:r>
+          </a:p>
+          <a:p>
+            <a:r>
+              <a:rPr lang="en-US"/>
+              <a:t>Timing warning: the first azd up includes a remote build and can run several minutes. Keep narrating what's happening - build, managed runtime, identity, versioning - or cut to the pre-deployed agent.</a:t>
+            </a:r>
+          </a:p>
+          <a:p>
+            <a:r>
+              <a:rPr lang="en-US"/>
+              <a:t>Transition: "When something breaks, work the layers."</a:t>
+            </a:r>
+          </a:p>
+        </p:txBody>
+      </p:sp>
+      <p:sp>
+        <p:nvSpPr>
+          <p:cNvPr id="4" name="Slide Number Placeholder 3"/>
+          <p:cNvSpPr>
+            <a:spLocks noGrp="1"/>
+          </p:cNvSpPr>
+          <p:nvPr>
+            <p:ph type="sldNum" sz="quarter" idx="5"/>
+          </p:nvPr>
+        </p:nvSpPr>
+        <p:spPr/>
+        <p:txBody>
+          <a:bodyPr/>
+          <a:lstStyle/>
+          <a:p>
+            <a:fld id="{1ECCB1A9-1BC1-4440-98A0-B2D1F6D1933C}" type="slidenum">
+              <a:rPr lang="en-US" smtClean="0"/>
+              <a:t>11</a:t>
+            </a:fld>
+            <a:endParaRPr lang="en-US"/>
+          </a:p>
+        </p:txBody>
+      </p:sp>
+    </p:spTree>
+    <p:extLst>
+      <p:ext uri="{BB962C8B-B14F-4D97-AF65-F5344CB8AC3E}">
+        <p14:creationId xmlns:p14="http://schemas.microsoft.com/office/powerpoint/2010/main" val="1994732393"/>
+      </p:ext>
+    </p:extLst>
+  </p:cSld>
+  <p:clrMapOvr>
+    <a:masterClrMapping/>
+  </p:clrMapOvr>
+</p:notes>
+</file>
+
+<file path=ppt/notesSlides/notesSlide12.xml><?xml version="1.0" encoding="utf-8"?>
+<p:notes xmlns:a="http://schemas.openxmlformats.org/drawingml/2006/main" xmlns:r="http://schemas.openxmlformats.org/officeDocument/2006/relationships" xmlns:p="http://schemas.openxmlformats.org/presentationml/2006/main">
+  <p:cSld>
+    <p:spTree>
+      <p:nvGrpSpPr>
+        <p:cNvPr id="1" name=""/>
+        <p:cNvGrpSpPr/>
+        <p:nvPr/>
+      </p:nvGrpSpPr>
+      <p:grpSpPr>
+        <a:xfrm>
+          <a:off x="0" y="0"/>
+          <a:ext cx="0" cy="0"/>
+          <a:chOff x="0" y="0"/>
+          <a:chExt cx="0" cy="0"/>
+        </a:xfrm>
+      </p:grpSpPr>
+      <p:sp>
+        <p:nvSpPr>
+          <p:cNvPr id="2" name="Slide Image Placeholder 1"/>
+          <p:cNvSpPr>
+            <a:spLocks noGrp="1" noRot="1" noChangeAspect="1"/>
+          </p:cNvSpPr>
+          <p:nvPr>
+            <p:ph type="sldImg"/>
+          </p:nvPr>
+        </p:nvSpPr>
+        <p:spPr/>
+      </p:sp>
+      <p:sp>
+        <p:nvSpPr>
+          <p:cNvPr id="3" name="Notes Placeholder 2"/>
+          <p:cNvSpPr>
+            <a:spLocks noGrp="1"/>
+          </p:cNvSpPr>
+          <p:nvPr>
+            <p:ph type="body" idx="1"/>
+          </p:nvPr>
+        </p:nvSpPr>
+        <p:spPr/>
+        <p:txBody>
+          <a:bodyPr/>
+          <a:lstStyle/>
+          <a:p>
+            <a:r>
+              <a:rPr lang="en-US"/>
+              <a:t>TROUBLESHOOTING TRIAGE (~4 min)</a:t>
+            </a:r>
+          </a:p>
+          <a:p>
+            <a:r>
+              <a:rPr lang="en-US"/>
+              <a:t>Method first: read the exact error, then fix the smallest failing layer. Don't restart the lab because of a one-line failure.</a:t>
+            </a:r>
+          </a:p>
+          <a:p>
+            <a:r>
+              <a:rPr lang="en-US"/>
+              <a:t>Walk the table:</a:t>
+            </a:r>
+          </a:p>
+          <a:p>
+            <a:r>
+              <a:rPr lang="en-US"/>
+              <a:t>- Validator fails -&gt; missing dependency or a wrong .env name. Follow the validator's guidance; never expose values while debugging.</a:t>
+            </a:r>
+          </a:p>
+          <a:p>
+            <a:r>
+              <a:rPr lang="en-US"/>
+              <a:t>- 401 / 403 -&gt; wrong auth context or RBAC still propagating. Align tenant and subscription, wait briefly, then retry.</a:t>
+            </a:r>
+          </a:p>
+          <a:p>
+            <a:r>
+              <a:rPr lang="en-US"/>
+              <a:t>- Model deployment error -&gt; quota or region availability. Use the assigned Skillable project; escalate the seat rather than provisioning a new one.</a:t>
+            </a:r>
+          </a:p>
+          <a:p>
+            <a:r>
+              <a:rPr lang="en-US"/>
+              <a:t>- Agent startup error -&gt; agent requirements not installed: pip install -r src/agent/requirements.txt</a:t>
+            </a:r>
+          </a:p>
+          <a:p>
+            <a:r>
+              <a:rPr lang="en-US"/>
+              <a:t>- azd deployment stalls -&gt; the first remote build is still running. Keep narrating; use staged output if needed.</a:t>
+            </a:r>
+          </a:p>
+          <a:p>
+            <a:r>
+              <a:rPr lang="en-US"/>
+              <a:t>Coaching point: say the symptom out loud as you triage. Attendees learn the debugging method as much as the fix.</a:t>
+            </a:r>
+          </a:p>
+          <a:p>
+            <a:r>
+              <a:rPr lang="en-US"/>
+              <a:t>Transition: "And when a fix isn't fast, protect the learning instead of the demo."</a:t>
+            </a:r>
+          </a:p>
+        </p:txBody>
+      </p:sp>
+      <p:sp>
+        <p:nvSpPr>
+          <p:cNvPr id="4" name="Slide Number Placeholder 3"/>
+          <p:cNvSpPr>
+            <a:spLocks noGrp="1"/>
+          </p:cNvSpPr>
+          <p:nvPr>
+            <p:ph type="sldNum" sz="quarter" idx="5"/>
+          </p:nvPr>
+        </p:nvSpPr>
+        <p:spPr/>
+        <p:txBody>
+          <a:bodyPr/>
+          <a:lstStyle/>
+          <a:p>
+            <a:fld id="{1ECCB1A9-1BC1-4440-98A0-B2D1F6D1933C}" type="slidenum">
+              <a:rPr lang="en-US" smtClean="0"/>
+              <a:t>12</a:t>
+            </a:fld>
+            <a:endParaRPr lang="en-US"/>
+          </a:p>
+        </p:txBody>
+      </p:sp>
+    </p:spTree>
+    <p:extLst>
+      <p:ext uri="{BB962C8B-B14F-4D97-AF65-F5344CB8AC3E}">
+        <p14:creationId xmlns:p14="http://schemas.microsoft.com/office/powerpoint/2010/main" val="1599833743"/>
+      </p:ext>
+    </p:extLst>
+  </p:cSld>
+  <p:clrMapOvr>
+    <a:masterClrMapping/>
+  </p:clrMapOvr>
+</p:notes>
+</file>
+
+<file path=ppt/notesSlides/notesSlide13.xml><?xml version="1.0" encoding="utf-8"?>
+<p:notes xmlns:a="http://schemas.openxmlformats.org/drawingml/2006/main" xmlns:r="http://schemas.openxmlformats.org/officeDocument/2006/relationships" xmlns:p="http://schemas.openxmlformats.org/presentationml/2006/main">
+  <p:cSld>
+    <p:spTree>
+      <p:nvGrpSpPr>
+        <p:cNvPr id="1" name=""/>
+        <p:cNvGrpSpPr/>
+        <p:nvPr/>
+      </p:nvGrpSpPr>
+      <p:grpSpPr>
+        <a:xfrm>
+          <a:off x="0" y="0"/>
+          <a:ext cx="0" cy="0"/>
+          <a:chOff x="0" y="0"/>
+          <a:chExt cx="0" cy="0"/>
+        </a:xfrm>
+      </p:grpSpPr>
+      <p:sp>
+        <p:nvSpPr>
+          <p:cNvPr id="2" name="Slide Image Placeholder 1"/>
+          <p:cNvSpPr>
+            <a:spLocks noGrp="1" noRot="1" noChangeAspect="1"/>
+          </p:cNvSpPr>
+          <p:nvPr>
+            <p:ph type="sldImg"/>
+          </p:nvPr>
+        </p:nvSpPr>
+        <p:spPr/>
+      </p:sp>
+      <p:sp>
+        <p:nvSpPr>
+          <p:cNvPr id="3" name="Notes Placeholder 2"/>
+          <p:cNvSpPr>
+            <a:spLocks noGrp="1"/>
+          </p:cNvSpPr>
+          <p:nvPr>
+            <p:ph type="body" idx="1"/>
+          </p:nvPr>
+        </p:nvSpPr>
+        <p:spPr/>
+        <p:txBody>
+          <a:bodyPr/>
+          <a:lstStyle/>
+          <a:p>
+            <a:r>
+              <a:rPr lang="en-US"/>
+              <a:t>PROTECT THE LEARNING FLOW (~3 min)</a:t>
+            </a:r>
+          </a:p>
+          <a:p>
+            <a:r>
+              <a:rPr lang="en-US"/>
+              <a:t>Principle: recovery options should preserve the concept, not just the demo. Attendees can still learn the idea from known-good output.</a:t>
+            </a:r>
+          </a:p>
+          <a:p>
+            <a:r>
+              <a:rPr lang="en-US"/>
+              <a:t>Three scenarios:</a:t>
+            </a:r>
+          </a:p>
+          <a:p>
+            <a:r>
+              <a:rPr lang="en-US"/>
+              <a:t>1. If inference fails - show known-good output, explain output_text, status, and usage, then let proctors repair affected seats while the room continues.</a:t>
+            </a:r>
+          </a:p>
+          <a:p>
+            <a:r>
+              <a:rPr lang="en-US"/>
+              <a:t>2. If deployment is slow - narrate remote build, managed runtime, identity, and versioning, then switch to a pre-deployed agent for the smoke test.</a:t>
+            </a:r>
+          </a:p>
+          <a:p>
+            <a:r>
+              <a:rPr lang="en-US"/>
+              <a:t>3. If a seat is blocked - pair the attendee with a working neighbour or move them to observation mode, and log the seat issue for venue support.</a:t>
+            </a:r>
+          </a:p>
+          <a:p>
+            <a:r>
+              <a:rPr lang="en-US"/>
+              <a:t>Hard rule: do not spend more than five minutes on one seat while the full room waits. Hand it to a proctor and keep going.</a:t>
+            </a:r>
+          </a:p>
+          <a:p>
+            <a:r>
+              <a:rPr lang="en-US"/>
+              <a:t>Delivery tip: announce the fallback rather than hiding it - "I'm going to use a pre-deployed agent so we stay on time" keeps credibility intact.</a:t>
+            </a:r>
+          </a:p>
+          <a:p>
+            <a:r>
+              <a:rPr lang="en-US"/>
+              <a:t>Transition: "Close by putting the whole journey back together."</a:t>
+            </a:r>
+          </a:p>
+        </p:txBody>
+      </p:sp>
+      <p:sp>
+        <p:nvSpPr>
+          <p:cNvPr id="4" name="Slide Number Placeholder 3"/>
+          <p:cNvSpPr>
+            <a:spLocks noGrp="1"/>
+          </p:cNvSpPr>
+          <p:nvPr>
+            <p:ph type="sldNum" sz="quarter" idx="5"/>
+          </p:nvPr>
+        </p:nvSpPr>
+        <p:spPr/>
+        <p:txBody>
+          <a:bodyPr/>
+          <a:lstStyle/>
+          <a:p>
+            <a:fld id="{1ECCB1A9-1BC1-4440-98A0-B2D1F6D1933C}" type="slidenum">
+              <a:rPr lang="en-US" smtClean="0"/>
+              <a:t>13</a:t>
+            </a:fld>
+            <a:endParaRPr lang="en-US"/>
+          </a:p>
+        </p:txBody>
+      </p:sp>
+    </p:spTree>
+    <p:extLst>
+      <p:ext uri="{BB962C8B-B14F-4D97-AF65-F5344CB8AC3E}">
+        <p14:creationId xmlns:p14="http://schemas.microsoft.com/office/powerpoint/2010/main" val="2215800575"/>
+      </p:ext>
+    </p:extLst>
+  </p:cSld>
+  <p:clrMapOvr>
+    <a:masterClrMapping/>
+  </p:clrMapOvr>
+</p:notes>
+</file>
+
+<file path=ppt/notesSlides/notesSlide14.xml><?xml version="1.0" encoding="utf-8"?>
+<p:notes xmlns:a="http://schemas.openxmlformats.org/drawingml/2006/main" xmlns:r="http://schemas.openxmlformats.org/officeDocument/2006/relationships" xmlns:p="http://schemas.openxmlformats.org/presentationml/2006/main">
+  <p:cSld>
+    <p:spTree>
+      <p:nvGrpSpPr>
+        <p:cNvPr id="1" name=""/>
+        <p:cNvGrpSpPr/>
+        <p:nvPr/>
+      </p:nvGrpSpPr>
+      <p:grpSpPr>
+        <a:xfrm>
+          <a:off x="0" y="0"/>
+          <a:ext cx="0" cy="0"/>
+          <a:chOff x="0" y="0"/>
+          <a:chExt cx="0" cy="0"/>
+        </a:xfrm>
+      </p:grpSpPr>
+      <p:sp>
+        <p:nvSpPr>
+          <p:cNvPr id="2" name="Slide Image Placeholder 1"/>
+          <p:cNvSpPr>
+            <a:spLocks noGrp="1" noRot="1" noChangeAspect="1"/>
+          </p:cNvSpPr>
+          <p:nvPr>
+            <p:ph type="sldImg"/>
+          </p:nvPr>
+        </p:nvSpPr>
+        <p:spPr/>
+      </p:sp>
+      <p:sp>
+        <p:nvSpPr>
+          <p:cNvPr id="3" name="Notes Placeholder 2"/>
+          <p:cNvSpPr>
+            <a:spLocks noGrp="1"/>
+          </p:cNvSpPr>
+          <p:nvPr>
+            <p:ph type="body" idx="1"/>
+          </p:nvPr>
+        </p:nvSpPr>
+        <p:spPr/>
+        <p:txBody>
+          <a:bodyPr/>
+          <a:lstStyle/>
+          <a:p>
+            <a:r>
+              <a:rPr lang="en-US"/>
+              <a:t>CLOSE ON THE COMPLETE JOURNEY (~5 min)</a:t>
+            </a:r>
+          </a:p>
+          <a:p>
+            <a:r>
+              <a:rPr lang="en-US"/>
+              <a:t>Return to the five-stage spine and let attendees narrate it back: catalog -&gt; project + .env -&gt; Responses API -&gt; JSON and routing -&gt; hosted agent. Discover, Verify, Connect, Govern, Deploy.</a:t>
+            </a:r>
+          </a:p>
+          <a:p>
+            <a:r>
+              <a:rPr lang="en-US"/>
+              <a:t>Restate the foundation message one final time: the model supplies signals; deterministic code owns the routing decision.</a:t>
+            </a:r>
+          </a:p>
+          <a:p>
+            <a:r>
+              <a:rPr lang="en-US"/>
+              <a:t>Point to the self-paced extensions: Lab 5 compares gpt-5.4-mini and gpt-5.4, and the optional evaluations compare generated coverage with curated golden cases. Encourage attendees to run these after the event on their own subscription.</a:t>
+            </a:r>
+          </a:p>
+          <a:p>
+            <a:r>
+              <a:rPr lang="en-US"/>
+              <a:t>Share the links on screen: resource center at aka.ms/aitour27-resource-center and the community at aka.ms/MicrosoftFoundryDiscord-AITour27.</a:t>
+            </a:r>
+          </a:p>
+          <a:p>
+            <a:r>
+              <a:rPr lang="en-US"/>
+              <a:t>Close with a clear call to action: pick one workflow in your own organisation where a model supplies signals and your code makes the decision, and prototype it this month.</a:t>
+            </a:r>
+          </a:p>
+          <a:p>
+            <a:r>
+              <a:rPr lang="en-US"/>
+              <a:t>Leave time for two or three questions, then thank the room and stay available for individual seat issues.</a:t>
+            </a:r>
+          </a:p>
+        </p:txBody>
+      </p:sp>
+      <p:sp>
+        <p:nvSpPr>
+          <p:cNvPr id="4" name="Slide Number Placeholder 3"/>
+          <p:cNvSpPr>
+            <a:spLocks noGrp="1"/>
+          </p:cNvSpPr>
+          <p:nvPr>
+            <p:ph type="sldNum" sz="quarter" idx="5"/>
+          </p:nvPr>
+        </p:nvSpPr>
+        <p:spPr/>
+        <p:txBody>
+          <a:bodyPr/>
+          <a:lstStyle/>
+          <a:p>
+            <a:fld id="{1ECCB1A9-1BC1-4440-98A0-B2D1F6D1933C}" type="slidenum">
+              <a:rPr lang="en-US" smtClean="0"/>
+              <a:t>14</a:t>
+            </a:fld>
+            <a:endParaRPr lang="en-US"/>
+          </a:p>
+        </p:txBody>
+      </p:sp>
+    </p:spTree>
+    <p:extLst>
+      <p:ext uri="{BB962C8B-B14F-4D97-AF65-F5344CB8AC3E}">
+        <p14:creationId xmlns:p14="http://schemas.microsoft.com/office/powerpoint/2010/main" val="1253745105"/>
+      </p:ext>
+    </p:extLst>
+  </p:cSld>
+  <p:clrMapOvr>
+    <a:masterClrMapping/>
+  </p:clrMapOvr>
+</p:notes>
+</file>
+
+<file path=ppt/notesSlides/notesSlide2.xml><?xml version="1.0" encoding="utf-8"?>
+<p:notes xmlns:a="http://schemas.openxmlformats.org/drawingml/2006/main" xmlns:r="http://schemas.openxmlformats.org/officeDocument/2006/relationships" xmlns:p="http://schemas.openxmlformats.org/presentationml/2006/main">
+  <p:cSld>
+    <p:spTree>
+      <p:nvGrpSpPr>
+        <p:cNvPr id="1" name=""/>
+        <p:cNvGrpSpPr/>
+        <p:nvPr/>
+      </p:nvGrpSpPr>
+      <p:grpSpPr>
+        <a:xfrm>
+          <a:off x="0" y="0"/>
+          <a:ext cx="0" cy="0"/>
+          <a:chOff x="0" y="0"/>
+          <a:chExt cx="0" cy="0"/>
+        </a:xfrm>
+      </p:grpSpPr>
+      <p:sp>
+        <p:nvSpPr>
+          <p:cNvPr id="2" name="Slide Image Placeholder 1"/>
+          <p:cNvSpPr>
+            <a:spLocks noGrp="1" noRot="1" noChangeAspect="1"/>
+          </p:cNvSpPr>
+          <p:nvPr>
+            <p:ph type="sldImg"/>
+          </p:nvPr>
+        </p:nvSpPr>
+        <p:spPr/>
+      </p:sp>
+      <p:sp>
+        <p:nvSpPr>
+          <p:cNvPr id="3" name="Notes Placeholder 2"/>
+          <p:cNvSpPr>
+            <a:spLocks noGrp="1"/>
+          </p:cNvSpPr>
+          <p:nvPr>
+            <p:ph type="body" idx="1"/>
+          </p:nvPr>
+        </p:nvSpPr>
+        <p:spPr/>
+        <p:txBody>
+          <a:bodyPr/>
+          <a:lstStyle/>
+          <a:p>
+            <a:r>
+              <a:rPr lang="en-US"/>
+              <a:t>TITLE - PRESENTER READINESS / TRAIN THE TRAINER (~1 min)</a:t>
+            </a:r>
+          </a:p>
+          <a:p>
+            <a:r>
+              <a:rPr lang="en-US"/>
+              <a:t>Say: "This is the trainer enablement pass for ILL335. By the end you should be able to deliver this workshop end to end, recover from the common failures, and keep a room of 60 people moving."</a:t>
+            </a:r>
+          </a:p>
+          <a:p>
+            <a:r>
+              <a:rPr lang="en-US"/>
+              <a:t>Frame the audience: these are presenters and proctors, not first-time attendees. The goal is delivery confidence, not new product content.</a:t>
+            </a:r>
+          </a:p>
+          <a:p>
+            <a:r>
+              <a:rPr lang="en-US"/>
+              <a:t>Set expectations: 75 minutes of lab time, six labs, a pre-provisioned Skillable environment, and a strict rule about never exposing secrets on screen.</a:t>
+            </a:r>
+          </a:p>
+          <a:p>
+            <a:r>
+              <a:rPr lang="en-US"/>
+              <a:t>Transition: "Start with the promise we're making to every attendee."</a:t>
+            </a:r>
+          </a:p>
+        </p:txBody>
+      </p:sp>
+      <p:sp>
+        <p:nvSpPr>
+          <p:cNvPr id="4" name="Slide Number Placeholder 3"/>
+          <p:cNvSpPr>
+            <a:spLocks noGrp="1"/>
+          </p:cNvSpPr>
+          <p:nvPr>
+            <p:ph type="sldNum" sz="quarter" idx="5"/>
+          </p:nvPr>
+        </p:nvSpPr>
+        <p:spPr/>
+        <p:txBody>
+          <a:bodyPr/>
+          <a:lstStyle/>
+          <a:p>
+            <a:fld id="{1ECCB1A9-1BC1-4440-98A0-B2D1F6D1933C}" type="slidenum">
+              <a:rPr lang="en-US" smtClean="0"/>
+              <a:t>2</a:t>
+            </a:fld>
+            <a:endParaRPr lang="en-US"/>
+          </a:p>
+        </p:txBody>
+      </p:sp>
+    </p:spTree>
+    <p:extLst>
+      <p:ext uri="{BB962C8B-B14F-4D97-AF65-F5344CB8AC3E}">
+        <p14:creationId xmlns:p14="http://schemas.microsoft.com/office/powerpoint/2010/main" val="1490066645"/>
+      </p:ext>
+    </p:extLst>
+  </p:cSld>
+  <p:clrMapOvr>
+    <a:masterClrMapping/>
+  </p:clrMapOvr>
+</p:notes>
+</file>
+
+<file path=ppt/notesSlides/notesSlide3.xml><?xml version="1.0" encoding="utf-8"?>
+<p:notes xmlns:a="http://schemas.openxmlformats.org/drawingml/2006/main" xmlns:r="http://schemas.openxmlformats.org/officeDocument/2006/relationships" xmlns:p="http://schemas.openxmlformats.org/presentationml/2006/main">
+  <p:cSld>
+    <p:spTree>
+      <p:nvGrpSpPr>
+        <p:cNvPr id="1" name=""/>
+        <p:cNvGrpSpPr/>
+        <p:nvPr/>
+      </p:nvGrpSpPr>
+      <p:grpSpPr>
+        <a:xfrm>
+          <a:off x="0" y="0"/>
+          <a:ext cx="0" cy="0"/>
+          <a:chOff x="0" y="0"/>
+          <a:chExt cx="0" cy="0"/>
+        </a:xfrm>
+      </p:grpSpPr>
+      <p:sp>
+        <p:nvSpPr>
+          <p:cNvPr id="2" name="Slide Image Placeholder 1"/>
+          <p:cNvSpPr>
+            <a:spLocks noGrp="1" noRot="1" noChangeAspect="1"/>
+          </p:cNvSpPr>
+          <p:nvPr>
+            <p:ph type="sldImg"/>
+          </p:nvPr>
+        </p:nvSpPr>
+        <p:spPr/>
+      </p:sp>
+      <p:sp>
+        <p:nvSpPr>
+          <p:cNvPr id="3" name="Notes Placeholder 2"/>
+          <p:cNvSpPr>
+            <a:spLocks noGrp="1"/>
+          </p:cNvSpPr>
+          <p:nvPr>
+            <p:ph type="body" idx="1"/>
+          </p:nvPr>
+        </p:nvSpPr>
+        <p:spPr/>
+        <p:txBody>
+          <a:bodyPr/>
+          <a:lstStyle/>
+          <a:p>
+            <a:r>
+              <a:rPr lang="en-US"/>
+              <a:t>THE WORKSHOP PROMISE (~3 min)</a:t>
+            </a:r>
+          </a:p>
+          <a:p>
+            <a:r>
+              <a:rPr lang="en-US"/>
+              <a:t>Purpose: give presenters the one-sentence outcome for each third of the workshop, so they can re-anchor the room at any point.</a:t>
+            </a:r>
+          </a:p>
+          <a:p>
+            <a:r>
+              <a:rPr lang="en-US"/>
+              <a:t>Walk the three outcomes:</a:t>
+            </a:r>
+          </a:p>
+          <a:p>
+            <a:r>
+              <a:rPr lang="en-US"/>
+              <a:t>1. Discover + connect - the attendee finds a suitable hosted model in the Foundry Toolkit catalog, verifies their project, and makes a first Responses API call.</a:t>
+            </a:r>
+          </a:p>
+          <a:p>
+            <a:r>
+              <a:rPr lang="en-US"/>
+              <a:t>2. Analyze + govern - they return structured sentiment JSON and route regulated signals independently for human review.</a:t>
+            </a:r>
+          </a:p>
+          <a:p>
+            <a:r>
+              <a:rPr lang="en-US"/>
+              <a:t>3. Test + deploy - they test locally in Agent Inspector and publish Python source as a managed hosted agent with azd.</a:t>
+            </a:r>
+          </a:p>
+          <a:p>
+            <a:r>
+              <a:rPr lang="en-US"/>
+              <a:t>Emphasize the foundation message: "The model supplies signals. Deterministic code owns the routing decision." Repeat this line at least three times during the session - it is the concept attendees should leave with even if a lab fails.</a:t>
+            </a:r>
+          </a:p>
+          <a:p>
+            <a:r>
+              <a:rPr lang="en-US"/>
+              <a:t>Transition: "Here's how those outcomes map to 75 minutes."</a:t>
+            </a:r>
+          </a:p>
+        </p:txBody>
+      </p:sp>
+      <p:sp>
+        <p:nvSpPr>
+          <p:cNvPr id="4" name="Slide Number Placeholder 3"/>
+          <p:cNvSpPr>
+            <a:spLocks noGrp="1"/>
+          </p:cNvSpPr>
+          <p:nvPr>
+            <p:ph type="sldNum" sz="quarter" idx="5"/>
+          </p:nvPr>
+        </p:nvSpPr>
+        <p:spPr/>
+        <p:txBody>
+          <a:bodyPr/>
+          <a:lstStyle/>
+          <a:p>
+            <a:fld id="{1ECCB1A9-1BC1-4440-98A0-B2D1F6D1933C}" type="slidenum">
+              <a:rPr lang="en-US" smtClean="0"/>
+              <a:t>3</a:t>
+            </a:fld>
+            <a:endParaRPr lang="en-US"/>
+          </a:p>
+        </p:txBody>
+      </p:sp>
+    </p:spTree>
+    <p:extLst>
+      <p:ext uri="{BB962C8B-B14F-4D97-AF65-F5344CB8AC3E}">
+        <p14:creationId xmlns:p14="http://schemas.microsoft.com/office/powerpoint/2010/main" val="3636065891"/>
+      </p:ext>
+    </p:extLst>
+  </p:cSld>
+  <p:clrMapOvr>
+    <a:masterClrMapping/>
+  </p:clrMapOvr>
+</p:notes>
+</file>
+
+<file path=ppt/notesSlides/notesSlide4.xml><?xml version="1.0" encoding="utf-8"?>
+<p:notes xmlns:a="http://schemas.openxmlformats.org/drawingml/2006/main" xmlns:r="http://schemas.openxmlformats.org/officeDocument/2006/relationships" xmlns:p="http://schemas.openxmlformats.org/presentationml/2006/main">
+  <p:cSld>
+    <p:spTree>
+      <p:nvGrpSpPr>
+        <p:cNvPr id="1" name=""/>
+        <p:cNvGrpSpPr/>
+        <p:nvPr/>
+      </p:nvGrpSpPr>
+      <p:grpSpPr>
+        <a:xfrm>
+          <a:off x="0" y="0"/>
+          <a:ext cx="0" cy="0"/>
+          <a:chOff x="0" y="0"/>
+          <a:chExt cx="0" cy="0"/>
+        </a:xfrm>
+      </p:grpSpPr>
+      <p:sp>
+        <p:nvSpPr>
+          <p:cNvPr id="2" name="Slide Image Placeholder 1"/>
+          <p:cNvSpPr>
+            <a:spLocks noGrp="1" noRot="1" noChangeAspect="1"/>
+          </p:cNvSpPr>
+          <p:nvPr>
+            <p:ph type="sldImg"/>
+          </p:nvPr>
+        </p:nvSpPr>
+        <p:spPr/>
+      </p:sp>
+      <p:sp>
+        <p:nvSpPr>
+          <p:cNvPr id="3" name="Notes Placeholder 2"/>
+          <p:cNvSpPr>
+            <a:spLocks noGrp="1"/>
+          </p:cNvSpPr>
+          <p:nvPr>
+            <p:ph type="body" idx="1"/>
+          </p:nvPr>
+        </p:nvSpPr>
+        <p:spPr/>
+        <p:txBody>
+          <a:bodyPr/>
+          <a:lstStyle/>
+          <a:p>
+            <a:r>
+              <a:rPr lang="en-US"/>
+              <a:t>RUN OF SHOW - 75 MINUTES (~3 min)</a:t>
+            </a:r>
+          </a:p>
+          <a:p>
+            <a:r>
+              <a:rPr lang="en-US"/>
+              <a:t>Purpose: give presenters the timing spine and the discipline to hold it.</a:t>
+            </a:r>
+          </a:p>
+          <a:p>
+            <a:r>
+              <a:rPr lang="en-US"/>
+              <a:t>Walk the blocks: Open 3, Lab 1 (10), Lab 2 (5), Lab 3 (12), Lab 4 (20), Lab 6 (20), Close 5.</a:t>
+            </a:r>
+          </a:p>
+          <a:p>
+            <a:r>
+              <a:rPr lang="en-US"/>
+              <a:t>Coach the timing: Labs 4 and 6 are where the learning lands, so protect them. If you are behind, compress Lab 1 - skip the Model Playground and just show the catalog comparison.</a:t>
+            </a:r>
+          </a:p>
+          <a:p>
+            <a:r>
+              <a:rPr lang="en-US"/>
+              <a:t>Note for trainers: Lab 5 (model comparison) and the optional evaluations are self-paced extensions, not part of the live run. Mention them at the close, don't teach them live.</a:t>
+            </a:r>
+          </a:p>
+          <a:p>
+            <a:r>
+              <a:rPr lang="en-US"/>
+              <a:t>Call out checkpoints: announce the remaining time at the end of each lab so attendees self-pace.</a:t>
+            </a:r>
+          </a:p>
+          <a:p>
+            <a:r>
+              <a:rPr lang="en-US"/>
+              <a:t>Transition: "Timing only works if the environment behaves - so know which environment you're in."</a:t>
+            </a:r>
+          </a:p>
+        </p:txBody>
+      </p:sp>
+      <p:sp>
+        <p:nvSpPr>
+          <p:cNvPr id="4" name="Slide Number Placeholder 3"/>
+          <p:cNvSpPr>
+            <a:spLocks noGrp="1"/>
+          </p:cNvSpPr>
+          <p:nvPr>
+            <p:ph type="sldNum" sz="quarter" idx="5"/>
+          </p:nvPr>
+        </p:nvSpPr>
+        <p:spPr/>
+        <p:txBody>
+          <a:bodyPr/>
+          <a:lstStyle/>
+          <a:p>
+            <a:fld id="{1ECCB1A9-1BC1-4440-98A0-B2D1F6D1933C}" type="slidenum">
+              <a:rPr lang="en-US" smtClean="0"/>
+              <a:t>4</a:t>
+            </a:fld>
+            <a:endParaRPr lang="en-US"/>
+          </a:p>
+        </p:txBody>
+      </p:sp>
+    </p:spTree>
+    <p:extLst>
+      <p:ext uri="{BB962C8B-B14F-4D97-AF65-F5344CB8AC3E}">
+        <p14:creationId xmlns:p14="http://schemas.microsoft.com/office/powerpoint/2010/main" val="1121744324"/>
+      </p:ext>
+    </p:extLst>
+  </p:cSld>
+  <p:clrMapOvr>
+    <a:masterClrMapping/>
+  </p:clrMapOvr>
+</p:notes>
+</file>
+
+<file path=ppt/notesSlides/notesSlide5.xml><?xml version="1.0" encoding="utf-8"?>
+<p:notes xmlns:a="http://schemas.openxmlformats.org/drawingml/2006/main" xmlns:r="http://schemas.openxmlformats.org/officeDocument/2006/relationships" xmlns:p="http://schemas.openxmlformats.org/presentationml/2006/main">
+  <p:cSld>
+    <p:spTree>
+      <p:nvGrpSpPr>
+        <p:cNvPr id="1" name=""/>
+        <p:cNvGrpSpPr/>
+        <p:nvPr/>
+      </p:nvGrpSpPr>
+      <p:grpSpPr>
+        <a:xfrm>
+          <a:off x="0" y="0"/>
+          <a:ext cx="0" cy="0"/>
+          <a:chOff x="0" y="0"/>
+          <a:chExt cx="0" cy="0"/>
+        </a:xfrm>
+      </p:grpSpPr>
+      <p:sp>
+        <p:nvSpPr>
+          <p:cNvPr id="2" name="Slide Image Placeholder 1"/>
+          <p:cNvSpPr>
+            <a:spLocks noGrp="1" noRot="1" noChangeAspect="1"/>
+          </p:cNvSpPr>
+          <p:nvPr>
+            <p:ph type="sldImg"/>
+          </p:nvPr>
+        </p:nvSpPr>
+        <p:spPr/>
+      </p:sp>
+      <p:sp>
+        <p:nvSpPr>
+          <p:cNvPr id="3" name="Notes Placeholder 2"/>
+          <p:cNvSpPr>
+            <a:spLocks noGrp="1"/>
+          </p:cNvSpPr>
+          <p:nvPr>
+            <p:ph type="body" idx="1"/>
+          </p:nvPr>
+        </p:nvSpPr>
+        <p:spPr/>
+        <p:txBody>
+          <a:bodyPr/>
+          <a:lstStyle/>
+          <a:p>
+            <a:r>
+              <a:rPr lang="en-US"/>
+              <a:t>KNOW THE DELIVERY ENVIRONMENT (~4 min)</a:t>
+            </a:r>
+          </a:p>
+          <a:p>
+            <a:r>
+              <a:rPr lang="en-US"/>
+              <a:t>Purpose: prevent the single most common delivery failure - a presenter following the self-paced setup instructions inside a pre-provisioned Skillable seat.</a:t>
+            </a:r>
+          </a:p>
+          <a:p>
+            <a:r>
+              <a:rPr lang="en-US"/>
+              <a:t>In the live Skillable lab everything is done for the attendee: repo cloned, Foundry project provisioned, gpt-5.4-mini deployed, .env configured, Foundry Toolkit installed, and credentials shown in the lab panel. Attendees should not provision anything.</a:t>
+            </a:r>
+          </a:p>
+          <a:p>
+            <a:r>
+              <a:rPr lang="en-US"/>
+              <a:t>For trainer rehearsal or self-study, the path is different: follow setup/SETUP.md, align the Azure CLI and azd tenant plus subscription, install the microsoft.foundry extension bundle, confirm model quota before provisioning, run the offline validator, and expect billable resources from azd up.</a:t>
+            </a:r>
+          </a:p>
+          <a:p>
+            <a:r>
+              <a:rPr lang="en-US"/>
+              <a:t>Say plainly: "If an attendee is trying to run setup steps, they are on the wrong path - send them back to the lab panel."</a:t>
+            </a:r>
+          </a:p>
+          <a:p>
+            <a:r>
+              <a:rPr lang="en-US"/>
+              <a:t>Hard rule to state out loud: never show .env values, access tokens, passwords, or connection strings on screen. Verify by printing variable names only, never values.</a:t>
+            </a:r>
+          </a:p>
+          <a:p>
+            <a:r>
+              <a:rPr lang="en-US"/>
+              <a:t>Transition: "Here's what you do before you ever walk into the room."</a:t>
+            </a:r>
+          </a:p>
+        </p:txBody>
+      </p:sp>
+      <p:sp>
+        <p:nvSpPr>
+          <p:cNvPr id="4" name="Slide Number Placeholder 3"/>
+          <p:cNvSpPr>
+            <a:spLocks noGrp="1"/>
+          </p:cNvSpPr>
+          <p:nvPr>
+            <p:ph type="sldNum" sz="quarter" idx="5"/>
+          </p:nvPr>
+        </p:nvSpPr>
+        <p:spPr/>
+        <p:txBody>
+          <a:bodyPr/>
+          <a:lstStyle/>
+          <a:p>
+            <a:fld id="{1ECCB1A9-1BC1-4440-98A0-B2D1F6D1933C}" type="slidenum">
+              <a:rPr lang="en-US" smtClean="0"/>
+              <a:t>5</a:t>
+            </a:fld>
+            <a:endParaRPr lang="en-US"/>
+          </a:p>
+        </p:txBody>
+      </p:sp>
+    </p:spTree>
+    <p:extLst>
+      <p:ext uri="{BB962C8B-B14F-4D97-AF65-F5344CB8AC3E}">
+        <p14:creationId xmlns:p14="http://schemas.microsoft.com/office/powerpoint/2010/main" val="2648719309"/>
+      </p:ext>
+    </p:extLst>
+  </p:cSld>
+  <p:clrMapOvr>
+    <a:masterClrMapping/>
+  </p:clrMapOvr>
+</p:notes>
+</file>
+
+<file path=ppt/notesSlides/notesSlide6.xml><?xml version="1.0" encoding="utf-8"?>
+<p:notes xmlns:a="http://schemas.openxmlformats.org/drawingml/2006/main" xmlns:r="http://schemas.openxmlformats.org/officeDocument/2006/relationships" xmlns:p="http://schemas.openxmlformats.org/presentationml/2006/main">
+  <p:cSld>
+    <p:spTree>
+      <p:nvGrpSpPr>
+        <p:cNvPr id="1" name=""/>
+        <p:cNvGrpSpPr/>
+        <p:nvPr/>
+      </p:nvGrpSpPr>
+      <p:grpSpPr>
+        <a:xfrm>
+          <a:off x="0" y="0"/>
+          <a:ext cx="0" cy="0"/>
+          <a:chOff x="0" y="0"/>
+          <a:chExt cx="0" cy="0"/>
+        </a:xfrm>
+      </p:grpSpPr>
+      <p:sp>
+        <p:nvSpPr>
+          <p:cNvPr id="2" name="Slide Image Placeholder 1"/>
+          <p:cNvSpPr>
+            <a:spLocks noGrp="1" noRot="1" noChangeAspect="1"/>
+          </p:cNvSpPr>
+          <p:nvPr>
+            <p:ph type="sldImg"/>
+          </p:nvPr>
+        </p:nvSpPr>
+        <p:spPr/>
+      </p:sp>
+      <p:sp>
+        <p:nvSpPr>
+          <p:cNvPr id="3" name="Notes Placeholder 2"/>
+          <p:cNvSpPr>
+            <a:spLocks noGrp="1"/>
+          </p:cNvSpPr>
+          <p:nvPr>
+            <p:ph type="body" idx="1"/>
+          </p:nvPr>
+        </p:nvSpPr>
+        <p:spPr/>
+        <p:txBody>
+          <a:bodyPr/>
+          <a:lstStyle/>
+          <a:p>
+            <a:r>
+              <a:rPr lang="en-US"/>
+              <a:t>PRESENTER READINESS CHECKLIST (~4 min)</a:t>
+            </a:r>
+          </a:p>
+          <a:p>
+            <a:r>
+              <a:rPr lang="en-US"/>
+              <a:t>Purpose: this is the pre-delivery contract. Complete it 24-48 hours before delivery, not the morning of.</a:t>
+            </a:r>
+          </a:p>
+          <a:p>
+            <a:r>
+              <a:rPr lang="en-US"/>
+              <a:t>Walk the six items:</a:t>
+            </a:r>
+          </a:p>
+          <a:p>
+            <a:r>
+              <a:rPr lang="en-US"/>
+              <a:t>01 Run every core lab on the exact delivery tenant and machine - a different tenant is a different result.</a:t>
+            </a:r>
+          </a:p>
+          <a:p>
+            <a:r>
+              <a:rPr lang="en-US"/>
+              <a:t>02 Validate the seat - the validator must end with zero failures and PASS.</a:t>
+            </a:r>
+          </a:p>
+          <a:p>
+            <a:r>
+              <a:rPr lang="en-US"/>
+              <a:t>03 Test both paths - first inference and local Agent Inspector, so you know what healthy output looks like.</a:t>
+            </a:r>
+          </a:p>
+          <a:p>
+            <a:r>
+              <a:rPr lang="en-US"/>
+              <a:t>04 Preflight cloud - azd 1.27.1 or later, the extension installed, auth aligned across CLI and azd.</a:t>
+            </a:r>
+          </a:p>
+          <a:p>
+            <a:r>
+              <a:rPr lang="en-US"/>
+              <a:t>05 Stage fallbacks - screenshots, known-good output, and a pre-deployed agent you can invoke if a live deploy stalls.</a:t>
+            </a:r>
+          </a:p>
+          <a:p>
+            <a:r>
+              <a:rPr lang="en-US"/>
+              <a:t>06 Protect the room - readable fonts, clean browser, no secrets visible anywhere.</a:t>
+            </a:r>
+          </a:p>
+          <a:p>
+            <a:r>
+              <a:rPr lang="en-US"/>
+              <a:t>Coaching point: item 05 is what separates a smooth session from a stalled one. Have the fallback assets open in a background tab before you start.</a:t>
+            </a:r>
+          </a:p>
+          <a:p>
+            <a:r>
+              <a:rPr lang="en-US"/>
+              <a:t>Transition: "Now the story you open with."</a:t>
+            </a:r>
+          </a:p>
+        </p:txBody>
+      </p:sp>
+      <p:sp>
+        <p:nvSpPr>
+          <p:cNvPr id="4" name="Slide Number Placeholder 3"/>
+          <p:cNvSpPr>
+            <a:spLocks noGrp="1"/>
+          </p:cNvSpPr>
+          <p:nvPr>
+            <p:ph type="sldNum" sz="quarter" idx="5"/>
+          </p:nvPr>
+        </p:nvSpPr>
+        <p:spPr/>
+        <p:txBody>
+          <a:bodyPr/>
+          <a:lstStyle/>
+          <a:p>
+            <a:fld id="{1ECCB1A9-1BC1-4440-98A0-B2D1F6D1933C}" type="slidenum">
+              <a:rPr lang="en-US" smtClean="0"/>
+              <a:t>6</a:t>
+            </a:fld>
+            <a:endParaRPr lang="en-US"/>
+          </a:p>
+        </p:txBody>
+      </p:sp>
+    </p:spTree>
+    <p:extLst>
+      <p:ext uri="{BB962C8B-B14F-4D97-AF65-F5344CB8AC3E}">
+        <p14:creationId xmlns:p14="http://schemas.microsoft.com/office/powerpoint/2010/main" val="3960456262"/>
+      </p:ext>
+    </p:extLst>
+  </p:cSld>
+  <p:clrMapOvr>
+    <a:masterClrMapping/>
+  </p:clrMapOvr>
+</p:notes>
+</file>
+
+<file path=ppt/notesSlides/notesSlide7.xml><?xml version="1.0" encoding="utf-8"?>
+<p:notes xmlns:a="http://schemas.openxmlformats.org/drawingml/2006/main" xmlns:r="http://schemas.openxmlformats.org/officeDocument/2006/relationships" xmlns:p="http://schemas.openxmlformats.org/presentationml/2006/main">
+  <p:cSld>
+    <p:spTree>
+      <p:nvGrpSpPr>
+        <p:cNvPr id="1" name=""/>
+        <p:cNvGrpSpPr/>
+        <p:nvPr/>
+      </p:nvGrpSpPr>
+      <p:grpSpPr>
+        <a:xfrm>
+          <a:off x="0" y="0"/>
+          <a:ext cx="0" cy="0"/>
+          <a:chOff x="0" y="0"/>
+          <a:chExt cx="0" cy="0"/>
+        </a:xfrm>
+      </p:grpSpPr>
+      <p:sp>
+        <p:nvSpPr>
+          <p:cNvPr id="2" name="Slide Image Placeholder 1"/>
+          <p:cNvSpPr>
+            <a:spLocks noGrp="1" noRot="1" noChangeAspect="1"/>
+          </p:cNvSpPr>
+          <p:nvPr>
+            <p:ph type="sldImg"/>
+          </p:nvPr>
+        </p:nvSpPr>
+        <p:spPr/>
+      </p:sp>
+      <p:sp>
+        <p:nvSpPr>
+          <p:cNvPr id="3" name="Notes Placeholder 2"/>
+          <p:cNvSpPr>
+            <a:spLocks noGrp="1"/>
+          </p:cNvSpPr>
+          <p:nvPr>
+            <p:ph type="body" idx="1"/>
+          </p:nvPr>
+        </p:nvSpPr>
+        <p:spPr/>
+        <p:txBody>
+          <a:bodyPr/>
+          <a:lstStyle/>
+          <a:p>
+            <a:r>
+              <a:rPr lang="en-US"/>
+              <a:t>OPEN WITH A CLEAR STORY (~3 min, mirrors the 3-minute Open block)</a:t>
+            </a:r>
+          </a:p>
+          <a:p>
+            <a:r>
+              <a:rPr lang="en-US"/>
+              <a:t>Purpose: model the opening narrative for presenters. Deliver it as you would in the room, then step out and explain why it works.</a:t>
+            </a:r>
+          </a:p>
+          <a:p>
+            <a:r>
+              <a:rPr lang="en-US"/>
+              <a:t>Set the role: "You are an AI developer on Caldova's commercial digital and customer engagement team."</a:t>
+            </a:r>
+          </a:p>
+          <a:p>
+            <a:r>
+              <a:rPr lang="en-US"/>
+              <a:t>Four beats:</a:t>
+            </a:r>
+          </a:p>
+          <a:p>
+            <a:r>
+              <a:rPr lang="en-US"/>
+              <a:t>- The signal: consumer feedback arrives at scale across B2C channels.</a:t>
+            </a:r>
+          </a:p>
+          <a:p>
+            <a:r>
+              <a:rPr lang="en-US"/>
+              <a:t>- The task: classify sentiment and summarize topics consistently.</a:t>
+            </a:r>
+          </a:p>
+          <a:p>
+            <a:r>
+              <a:rPr lang="en-US"/>
+              <a:t>- The guardrail: route regulated signals to people, independently from sentiment.</a:t>
+            </a:r>
+          </a:p>
+          <a:p>
+            <a:r>
+              <a:rPr lang="en-US"/>
+              <a:t>- The finish: deploy the workflow as a callable hosted agent.</a:t>
+            </a:r>
+          </a:p>
+          <a:p>
+            <a:r>
+              <a:rPr lang="en-US"/>
+              <a:t>Why it works: it gives every lab a business reason, and it plants the governance idea before any code appears - so Lab 4 lands as an obvious requirement rather than an extra step.</a:t>
+            </a:r>
+          </a:p>
+          <a:p>
+            <a:r>
+              <a:rPr lang="en-US"/>
+              <a:t>Keep it under three minutes. Resist adding product history.</a:t>
+            </a:r>
+          </a:p>
+          <a:p>
+            <a:r>
+              <a:rPr lang="en-US"/>
+              <a:t>Transition: "Labs 1 and 2 get everyone oriented and verified."</a:t>
+            </a:r>
+          </a:p>
+        </p:txBody>
+      </p:sp>
+      <p:sp>
+        <p:nvSpPr>
+          <p:cNvPr id="4" name="Slide Number Placeholder 3"/>
+          <p:cNvSpPr>
+            <a:spLocks noGrp="1"/>
+          </p:cNvSpPr>
+          <p:nvPr>
+            <p:ph type="sldNum" sz="quarter" idx="5"/>
+          </p:nvPr>
+        </p:nvSpPr>
+        <p:spPr/>
+        <p:txBody>
+          <a:bodyPr/>
+          <a:lstStyle/>
+          <a:p>
+            <a:fld id="{1ECCB1A9-1BC1-4440-98A0-B2D1F6D1933C}" type="slidenum">
+              <a:rPr lang="en-US" smtClean="0"/>
+              <a:t>7</a:t>
+            </a:fld>
+            <a:endParaRPr lang="en-US"/>
+          </a:p>
+        </p:txBody>
+      </p:sp>
+    </p:spTree>
+    <p:extLst>
+      <p:ext uri="{BB962C8B-B14F-4D97-AF65-F5344CB8AC3E}">
+        <p14:creationId xmlns:p14="http://schemas.microsoft.com/office/powerpoint/2010/main" val="492118386"/>
+      </p:ext>
+    </p:extLst>
+  </p:cSld>
+  <p:clrMapOvr>
+    <a:masterClrMapping/>
+  </p:clrMapOvr>
+</p:notes>
+</file>
+
+<file path=ppt/notesSlides/notesSlide8.xml><?xml version="1.0" encoding="utf-8"?>
+<p:notes xmlns:a="http://schemas.openxmlformats.org/drawingml/2006/main" xmlns:r="http://schemas.openxmlformats.org/officeDocument/2006/relationships" xmlns:p="http://schemas.openxmlformats.org/presentationml/2006/main">
+  <p:cSld>
+    <p:spTree>
+      <p:nvGrpSpPr>
+        <p:cNvPr id="1" name=""/>
+        <p:cNvGrpSpPr/>
+        <p:nvPr/>
+      </p:nvGrpSpPr>
+      <p:grpSpPr>
+        <a:xfrm>
+          <a:off x="0" y="0"/>
+          <a:ext cx="0" cy="0"/>
+          <a:chOff x="0" y="0"/>
+          <a:chExt cx="0" cy="0"/>
+        </a:xfrm>
+      </p:grpSpPr>
+      <p:sp>
+        <p:nvSpPr>
+          <p:cNvPr id="2" name="Slide Image Placeholder 1"/>
+          <p:cNvSpPr>
+            <a:spLocks noGrp="1" noRot="1" noChangeAspect="1"/>
+          </p:cNvSpPr>
+          <p:nvPr>
+            <p:ph type="sldImg"/>
+          </p:nvPr>
+        </p:nvSpPr>
+        <p:spPr/>
+      </p:sp>
+      <p:sp>
+        <p:nvSpPr>
+          <p:cNvPr id="3" name="Notes Placeholder 2"/>
+          <p:cNvSpPr>
+            <a:spLocks noGrp="1"/>
+          </p:cNvSpPr>
+          <p:nvPr>
+            <p:ph type="body" idx="1"/>
+          </p:nvPr>
+        </p:nvSpPr>
+        <p:spPr/>
+        <p:txBody>
+          <a:bodyPr/>
+          <a:lstStyle/>
+          <a:p>
+            <a:r>
+              <a:rPr lang="en-US"/>
+              <a:t>LABS 1-2: ORIENT, THEN VERIFY (~15 min live: 10 + 5)</a:t>
+            </a:r>
+          </a:p>
+          <a:p>
+            <a:r>
+              <a:rPr lang="en-US"/>
+              <a:t>Lab 1 - Foundry Toolkit. Show the Model Catalog under Developer Tools. Compare gpt-5.4-mini, gpt-5.4, and Phi-4 across capability, quality, latency, and cost. The teaching point is model selection as an engineering trade-off, not a leaderboard. Use the Model Playground only if you are on time.</a:t>
+            </a:r>
+          </a:p>
+          <a:p>
+            <a:r>
+              <a:rPr lang="en-US"/>
+              <a:t>Lab 2 - Validation. Confirm PROJECT_ENDPOINT and MODEL_DEPLOYMENT_NAME exist without revealing their values. Run: python -X utf8 src/tests/validate_lab.py</a:t>
+            </a:r>
+          </a:p>
+          <a:p>
+            <a:r>
+              <a:rPr lang="en-US"/>
+              <a:t>Gate the room here: proceed only when the result is PASS with zero failed checks. It is far cheaper to fix a seat now than during Lab 4.</a:t>
+            </a:r>
+          </a:p>
+          <a:p>
+            <a:r>
+              <a:rPr lang="en-US"/>
+              <a:t>Critical rule: do not reprovision Skillable seats. If a seat is broken, escalate it to a proctor and keep the room moving.</a:t>
+            </a:r>
+          </a:p>
+          <a:p>
+            <a:r>
+              <a:rPr lang="en-US"/>
+              <a:t>Watch for: attendees editing .env by hand, and anyone screen-sharing values during the check.</a:t>
+            </a:r>
+          </a:p>
+          <a:p>
+            <a:r>
+              <a:rPr lang="en-US"/>
+              <a:t>Transition: "With everyone verified, we move from a raw response to a governed application."</a:t>
+            </a:r>
+          </a:p>
+        </p:txBody>
+      </p:sp>
+      <p:sp>
+        <p:nvSpPr>
+          <p:cNvPr id="4" name="Slide Number Placeholder 3"/>
+          <p:cNvSpPr>
+            <a:spLocks noGrp="1"/>
+          </p:cNvSpPr>
+          <p:nvPr>
+            <p:ph type="sldNum" sz="quarter" idx="5"/>
+          </p:nvPr>
+        </p:nvSpPr>
+        <p:spPr/>
+        <p:txBody>
+          <a:bodyPr/>
+          <a:lstStyle/>
+          <a:p>
+            <a:fld id="{1ECCB1A9-1BC1-4440-98A0-B2D1F6D1933C}" type="slidenum">
+              <a:rPr lang="en-US" smtClean="0"/>
+              <a:t>8</a:t>
+            </a:fld>
+            <a:endParaRPr lang="en-US"/>
+          </a:p>
+        </p:txBody>
+      </p:sp>
+    </p:spTree>
+    <p:extLst>
+      <p:ext uri="{BB962C8B-B14F-4D97-AF65-F5344CB8AC3E}">
+        <p14:creationId xmlns:p14="http://schemas.microsoft.com/office/powerpoint/2010/main" val="3092726747"/>
+      </p:ext>
+    </p:extLst>
+  </p:cSld>
+  <p:clrMapOvr>
+    <a:masterClrMapping/>
+  </p:clrMapOvr>
+</p:notes>
+</file>
+
+<file path=ppt/notesSlides/notesSlide9.xml><?xml version="1.0" encoding="utf-8"?>
+<p:notes xmlns:a="http://schemas.openxmlformats.org/drawingml/2006/main" xmlns:r="http://schemas.openxmlformats.org/officeDocument/2006/relationships" xmlns:p="http://schemas.openxmlformats.org/presentationml/2006/main">
+  <p:cSld>
+    <p:spTree>
+      <p:nvGrpSpPr>
+        <p:cNvPr id="1" name=""/>
+        <p:cNvGrpSpPr/>
+        <p:nvPr/>
+      </p:nvGrpSpPr>
+      <p:grpSpPr>
+        <a:xfrm>
+          <a:off x="0" y="0"/>
+          <a:ext cx="0" cy="0"/>
+          <a:chOff x="0" y="0"/>
+          <a:chExt cx="0" cy="0"/>
+        </a:xfrm>
+      </p:grpSpPr>
+      <p:sp>
+        <p:nvSpPr>
+          <p:cNvPr id="2" name="Slide Image Placeholder 1"/>
+          <p:cNvSpPr>
+            <a:spLocks noGrp="1" noRot="1" noChangeAspect="1"/>
+          </p:cNvSpPr>
+          <p:nvPr>
+            <p:ph type="sldImg"/>
+          </p:nvPr>
+        </p:nvSpPr>
+        <p:spPr/>
+      </p:sp>
+      <p:sp>
+        <p:nvSpPr>
+          <p:cNvPr id="3" name="Notes Placeholder 2"/>
+          <p:cNvSpPr>
+            <a:spLocks noGrp="1"/>
+          </p:cNvSpPr>
+          <p:nvPr>
+            <p:ph type="body" idx="1"/>
+          </p:nvPr>
+        </p:nvSpPr>
+        <p:spPr/>
+        <p:txBody>
+          <a:bodyPr/>
+          <a:lstStyle/>
+          <a:p>
+            <a:r>
+              <a:rPr lang="en-US"/>
+              <a:t>LABS 3-4: FROM RESPONSE TO GOVERNED APP (~32 min live: 12 + 20)</a:t>
+            </a:r>
+          </a:p>
+          <a:p>
+            <a:r>
+              <a:rPr lang="en-US"/>
+              <a:t>Use the five-stage spine on screen - Discover, Verify, Connect, Govern, Deploy - to show attendees where they are. Right now they're at Connect and Govern.</a:t>
+            </a:r>
+          </a:p>
+          <a:p>
+            <a:r>
+              <a:rPr lang="en-US"/>
+              <a:t>Lab 3 (12 min): AIProjectClient -&gt; get_openai_client() -&gt; responses.create() -&gt; output_text plus usage. Narrate each hop: the project client is the entry point, the OpenAI-shaped client is the familiar surface, and usage is how they'll reason about cost later.</a:t>
+            </a:r>
+          </a:p>
+          <a:p>
+            <a:r>
+              <a:rPr lang="en-US"/>
+              <a:t>Lab 4 (20 min): structured JSON output, conservative parsing, an independent review_category, and a deterministic route. This is the heart of the workshop - protect the full 20 minutes.</a:t>
+            </a:r>
+          </a:p>
+          <a:p>
+            <a:r>
+              <a:rPr lang="en-US"/>
+              <a:t>Narrate the boundary explicitly: the model produces probabilistic signals; your code makes the decision. Conservative parsing means a malformed response falls back safely rather than guessing.</a:t>
+            </a:r>
+          </a:p>
+          <a:p>
+            <a:r>
+              <a:rPr lang="en-US"/>
+              <a:t>Common stumbles: schema drift in the model output, and attendees inferring review_category from sentiment. Correct that immediately - see the next slide.</a:t>
+            </a:r>
+          </a:p>
+          <a:p>
+            <a:r>
+              <a:rPr lang="en-US"/>
+              <a:t>Transition: "This next point is the one thing you cannot skip."</a:t>
+            </a:r>
+          </a:p>
+        </p:txBody>
+      </p:sp>
+      <p:sp>
+        <p:nvSpPr>
+          <p:cNvPr id="4" name="Slide Number Placeholder 3"/>
+          <p:cNvSpPr>
+            <a:spLocks noGrp="1"/>
+          </p:cNvSpPr>
+          <p:nvPr>
+            <p:ph type="sldNum" sz="quarter" idx="5"/>
+          </p:nvPr>
+        </p:nvSpPr>
+        <p:spPr/>
+        <p:txBody>
+          <a:bodyPr/>
+          <a:lstStyle/>
+          <a:p>
+            <a:fld id="{1ECCB1A9-1BC1-4440-98A0-B2D1F6D1933C}" type="slidenum">
+              <a:rPr lang="en-US" smtClean="0"/>
+              <a:t>9</a:t>
+            </a:fld>
+            <a:endParaRPr lang="en-US"/>
+          </a:p>
+        </p:txBody>
+      </p:sp>
+    </p:spTree>
+    <p:extLst>
+      <p:ext uri="{BB962C8B-B14F-4D97-AF65-F5344CB8AC3E}">
+        <p14:creationId xmlns:p14="http://schemas.microsoft.com/office/powerpoint/2010/main" val="4163244062"/>
+      </p:ext>
+    </p:extLst>
+  </p:cSld>
+  <p:clrMapOvr>
+    <a:masterClrMapping/>
+  </p:clrMapOvr>
+</p:notes>
 </file>
 
 <file path=ppt/slideLayouts/slideLayout1.xml><?xml version="1.0" encoding="utf-8"?>
@@ -366,7 +2485,7 @@
           <a:p>
             <a:fld id="{5BCAD085-E8A6-8845-BD4E-CB4CCA059FC4}" type="datetimeFigureOut">
               <a:rPr lang="en-US" smtClean="0"/>
-              <a:t>9/8/2026</a:t>
+              <a:t>9/10/2026</a:t>
             </a:fld>
             <a:endParaRPr lang="en-US"/>
           </a:p>
@@ -534,7 +2653,7 @@
           <a:p>
             <a:fld id="{5BCAD085-E8A6-8845-BD4E-CB4CCA059FC4}" type="datetimeFigureOut">
               <a:rPr lang="en-US" smtClean="0"/>
-              <a:t>9/8/2026</a:t>
+              <a:t>9/10/2026</a:t>
             </a:fld>
             <a:endParaRPr lang="en-US"/>
           </a:p>
@@ -712,7 +2831,7 @@
           <a:p>
             <a:fld id="{5BCAD085-E8A6-8845-BD4E-CB4CCA059FC4}" type="datetimeFigureOut">
               <a:rPr lang="en-US" smtClean="0"/>
-              <a:t>9/8/2026</a:t>
+              <a:t>9/10/2026</a:t>
             </a:fld>
             <a:endParaRPr lang="en-US"/>
           </a:p>
@@ -3668,7 +5787,7 @@
           <a:p>
             <a:fld id="{5BCAD085-E8A6-8845-BD4E-CB4CCA059FC4}" type="datetimeFigureOut">
               <a:rPr lang="en-US" smtClean="0"/>
-              <a:t>9/8/2026</a:t>
+              <a:t>9/10/2026</a:t>
             </a:fld>
             <a:endParaRPr lang="en-US"/>
           </a:p>
@@ -3913,7 +6032,7 @@
           <a:p>
             <a:fld id="{5BCAD085-E8A6-8845-BD4E-CB4CCA059FC4}" type="datetimeFigureOut">
               <a:rPr lang="en-US" smtClean="0"/>
-              <a:t>9/8/2026</a:t>
+              <a:t>9/10/2026</a:t>
             </a:fld>
             <a:endParaRPr lang="en-US"/>
           </a:p>
@@ -4198,7 +6317,7 @@
           <a:p>
             <a:fld id="{5BCAD085-E8A6-8845-BD4E-CB4CCA059FC4}" type="datetimeFigureOut">
               <a:rPr lang="en-US" smtClean="0"/>
-              <a:t>9/8/2026</a:t>
+              <a:t>9/10/2026</a:t>
             </a:fld>
             <a:endParaRPr lang="en-US"/>
           </a:p>
@@ -4617,7 +6736,7 @@
           <a:p>
             <a:fld id="{5BCAD085-E8A6-8845-BD4E-CB4CCA059FC4}" type="datetimeFigureOut">
               <a:rPr lang="en-US" smtClean="0"/>
-              <a:t>9/8/2026</a:t>
+              <a:t>9/10/2026</a:t>
             </a:fld>
             <a:endParaRPr lang="en-US"/>
           </a:p>
@@ -4734,7 +6853,7 @@
           <a:p>
             <a:fld id="{5BCAD085-E8A6-8845-BD4E-CB4CCA059FC4}" type="datetimeFigureOut">
               <a:rPr lang="en-US" smtClean="0"/>
-              <a:t>9/8/2026</a:t>
+              <a:t>9/10/2026</a:t>
             </a:fld>
             <a:endParaRPr lang="en-US"/>
           </a:p>
@@ -4829,7 +6948,7 @@
           <a:p>
             <a:fld id="{5BCAD085-E8A6-8845-BD4E-CB4CCA059FC4}" type="datetimeFigureOut">
               <a:rPr lang="en-US" smtClean="0"/>
-              <a:t>9/8/2026</a:t>
+              <a:t>9/10/2026</a:t>
             </a:fld>
             <a:endParaRPr lang="en-US"/>
           </a:p>
@@ -5104,7 +7223,7 @@
           <a:p>
             <a:fld id="{5BCAD085-E8A6-8845-BD4E-CB4CCA059FC4}" type="datetimeFigureOut">
               <a:rPr lang="en-US" smtClean="0"/>
-              <a:t>9/8/2026</a:t>
+              <a:t>9/10/2026</a:t>
             </a:fld>
             <a:endParaRPr lang="en-US"/>
           </a:p>
@@ -5356,7 +7475,7 @@
           <a:p>
             <a:fld id="{5BCAD085-E8A6-8845-BD4E-CB4CCA059FC4}" type="datetimeFigureOut">
               <a:rPr lang="en-US" smtClean="0"/>
-              <a:t>9/8/2026</a:t>
+              <a:t>9/10/2026</a:t>
             </a:fld>
             <a:endParaRPr lang="en-US"/>
           </a:p>
@@ -5567,7 +7686,7 @@
           <a:p>
             <a:fld id="{5BCAD085-E8A6-8845-BD4E-CB4CCA059FC4}" type="datetimeFigureOut">
               <a:rPr lang="en-US" smtClean="0"/>
-              <a:t>9/8/2026</a:t>
+              <a:t>9/10/2026</a:t>
             </a:fld>
             <a:endParaRPr lang="en-US"/>
           </a:p>
@@ -17766,6 +19885,301 @@
 </a:theme>
 </file>
 
+<file path=ppt/theme/theme2.xml><?xml version="1.0" encoding="utf-8"?>
+<a:theme xmlns:a="http://schemas.openxmlformats.org/drawingml/2006/main" name="Office Theme">
+  <a:themeElements>
+    <a:clrScheme name="Office">
+      <a:dk1>
+        <a:sysClr val="windowText" lastClr="000000"/>
+      </a:dk1>
+      <a:lt1>
+        <a:sysClr val="window" lastClr="FFFFFF"/>
+      </a:lt1>
+      <a:dk2>
+        <a:srgbClr val="44546A"/>
+      </a:dk2>
+      <a:lt2>
+        <a:srgbClr val="E7E6E6"/>
+      </a:lt2>
+      <a:accent1>
+        <a:srgbClr val="4472C4"/>
+      </a:accent1>
+      <a:accent2>
+        <a:srgbClr val="ED7D31"/>
+      </a:accent2>
+      <a:accent3>
+        <a:srgbClr val="A5A5A5"/>
+      </a:accent3>
+      <a:accent4>
+        <a:srgbClr val="FFC000"/>
+      </a:accent4>
+      <a:accent5>
+        <a:srgbClr val="5B9BD5"/>
+      </a:accent5>
+      <a:accent6>
+        <a:srgbClr val="70AD47"/>
+      </a:accent6>
+      <a:hlink>
+        <a:srgbClr val="0563C1"/>
+      </a:hlink>
+      <a:folHlink>
+        <a:srgbClr val="954F72"/>
+      </a:folHlink>
+    </a:clrScheme>
+    <a:fontScheme name="Office">
+      <a:majorFont>
+        <a:latin typeface="Calibri Light" panose="020F0302020204030204"/>
+        <a:ea typeface=""/>
+        <a:cs typeface=""/>
+        <a:font script="Jpan" typeface="游ゴシック Light"/>
+        <a:font script="Hang" typeface="맑은 고딕"/>
+        <a:font script="Hans" typeface="等线 Light"/>
+        <a:font script="Hant" typeface="新細明體"/>
+        <a:font script="Arab" typeface="Times New Roman"/>
+        <a:font script="Hebr" typeface="Times New Roman"/>
+        <a:font script="Thai" typeface="Angsana New"/>
+        <a:font script="Ethi" typeface="Nyala"/>
+        <a:font script="Beng" typeface="Vrinda"/>
+        <a:font script="Gujr" typeface="Shruti"/>
+        <a:font script="Khmr" typeface="MoolBoran"/>
+        <a:font script="Knda" typeface="Tunga"/>
+        <a:font script="Guru" typeface="Raavi"/>
+        <a:font script="Cans" typeface="Euphemia"/>
+        <a:font script="Cher" typeface="Plantagenet Cherokee"/>
+        <a:font script="Yiii" typeface="Microsoft Yi Baiti"/>
+        <a:font script="Tibt" typeface="Microsoft Himalaya"/>
+        <a:font script="Thaa" typeface="MV Boli"/>
+        <a:font script="Deva" typeface="Mangal"/>
+        <a:font script="Telu" typeface="Gautami"/>
+        <a:font script="Taml" typeface="Latha"/>
+        <a:font script="Syrc" typeface="Estrangelo Edessa"/>
+        <a:font script="Orya" typeface="Kalinga"/>
+        <a:font script="Mlym" typeface="Kartika"/>
+        <a:font script="Laoo" typeface="DokChampa"/>
+        <a:font script="Sinh" typeface="Iskoola Pota"/>
+        <a:font script="Mong" typeface="Mongolian Baiti"/>
+        <a:font script="Viet" typeface="Times New Roman"/>
+        <a:font script="Uigh" typeface="Microsoft Uighur"/>
+        <a:font script="Geor" typeface="Sylfaen"/>
+        <a:font script="Armn" typeface="Arial"/>
+        <a:font script="Bugi" typeface="Leelawadee UI"/>
+        <a:font script="Bopo" typeface="Microsoft JhengHei"/>
+        <a:font script="Java" typeface="Javanese Text"/>
+        <a:font script="Lisu" typeface="Segoe UI"/>
+        <a:font script="Mymr" typeface="Myanmar Text"/>
+        <a:font script="Nkoo" typeface="Ebrima"/>
+        <a:font script="Olck" typeface="Nirmala UI"/>
+        <a:font script="Osma" typeface="Ebrima"/>
+        <a:font script="Phag" typeface="Phagspa"/>
+        <a:font script="Syrn" typeface="Estrangelo Edessa"/>
+        <a:font script="Syrj" typeface="Estrangelo Edessa"/>
+        <a:font script="Syre" typeface="Estrangelo Edessa"/>
+        <a:font script="Sora" typeface="Nirmala UI"/>
+        <a:font script="Tale" typeface="Microsoft Tai Le"/>
+        <a:font script="Talu" typeface="Microsoft New Tai Lue"/>
+        <a:font script="Tfng" typeface="Ebrima"/>
+      </a:majorFont>
+      <a:minorFont>
+        <a:latin typeface="Calibri" panose="020F0502020204030204"/>
+        <a:ea typeface=""/>
+        <a:cs typeface=""/>
+        <a:font script="Jpan" typeface="游ゴシック"/>
+        <a:font script="Hang" typeface="맑은 고딕"/>
+        <a:font script="Hans" typeface="等线"/>
+        <a:font script="Hant" typeface="新細明體"/>
+        <a:font script="Arab" typeface="Arial"/>
+        <a:font script="Hebr" typeface="Arial"/>
+        <a:font script="Thai" typeface="Cordia New"/>
+        <a:font script="Ethi" typeface="Nyala"/>
+        <a:font script="Beng" typeface="Vrinda"/>
+        <a:font script="Gujr" typeface="Shruti"/>
+        <a:font script="Khmr" typeface="DaunPenh"/>
+        <a:font script="Knda" typeface="Tunga"/>
+        <a:font script="Guru" typeface="Raavi"/>
+        <a:font script="Cans" typeface="Euphemia"/>
+        <a:font script="Cher" typeface="Plantagenet Cherokee"/>
+        <a:font script="Yiii" typeface="Microsoft Yi Baiti"/>
+        <a:font script="Tibt" typeface="Microsoft Himalaya"/>
+        <a:font script="Thaa" typeface="MV Boli"/>
+        <a:font script="Deva" typeface="Mangal"/>
+        <a:font script="Telu" typeface="Gautami"/>
+        <a:font script="Taml" typeface="Latha"/>
+        <a:font script="Syrc" typeface="Estrangelo Edessa"/>
+        <a:font script="Orya" typeface="Kalinga"/>
+        <a:font script="Mlym" typeface="Kartika"/>
+        <a:font script="Laoo" typeface="DokChampa"/>
+        <a:font script="Sinh" typeface="Iskoola Pota"/>
+        <a:font script="Mong" typeface="Mongolian Baiti"/>
+        <a:font script="Viet" typeface="Arial"/>
+        <a:font script="Uigh" typeface="Microsoft Uighur"/>
+        <a:font script="Geor" typeface="Sylfaen"/>
+        <a:font script="Armn" typeface="Arial"/>
+        <a:font script="Bugi" typeface="Leelawadee UI"/>
+        <a:font script="Bopo" typeface="Microsoft JhengHei"/>
+        <a:font script="Java" typeface="Javanese Text"/>
+        <a:font script="Lisu" typeface="Segoe UI"/>
+        <a:font script="Mymr" typeface="Myanmar Text"/>
+        <a:font script="Nkoo" typeface="Ebrima"/>
+        <a:font script="Olck" typeface="Nirmala UI"/>
+        <a:font script="Osma" typeface="Ebrima"/>
+        <a:font script="Phag" typeface="Phagspa"/>
+        <a:font script="Syrn" typeface="Estrangelo Edessa"/>
+        <a:font script="Syrj" typeface="Estrangelo Edessa"/>
+        <a:font script="Syre" typeface="Estrangelo Edessa"/>
+        <a:font script="Sora" typeface="Nirmala UI"/>
+        <a:font script="Tale" typeface="Microsoft Tai Le"/>
+        <a:font script="Talu" typeface="Microsoft New Tai Lue"/>
+        <a:font script="Tfng" typeface="Ebrima"/>
+      </a:minorFont>
+    </a:fontScheme>
+    <a:fmtScheme name="Office">
+      <a:fillStyleLst>
+        <a:solidFill>
+          <a:schemeClr val="phClr"/>
+        </a:solidFill>
+        <a:gradFill rotWithShape="1">
+          <a:gsLst>
+            <a:gs pos="0">
+              <a:schemeClr val="phClr">
+                <a:lumMod val="110000"/>
+                <a:satMod val="105000"/>
+                <a:tint val="67000"/>
+              </a:schemeClr>
+            </a:gs>
+            <a:gs pos="50000">
+              <a:schemeClr val="phClr">
+                <a:lumMod val="105000"/>
+                <a:satMod val="103000"/>
+                <a:tint val="73000"/>
+              </a:schemeClr>
+            </a:gs>
+            <a:gs pos="100000">
+              <a:schemeClr val="phClr">
+                <a:lumMod val="105000"/>
+                <a:satMod val="109000"/>
+                <a:tint val="81000"/>
+              </a:schemeClr>
+            </a:gs>
+          </a:gsLst>
+          <a:lin ang="5400000" scaled="0"/>
+        </a:gradFill>
+        <a:gradFill rotWithShape="1">
+          <a:gsLst>
+            <a:gs pos="0">
+              <a:schemeClr val="phClr">
+                <a:satMod val="103000"/>
+                <a:lumMod val="102000"/>
+                <a:tint val="94000"/>
+              </a:schemeClr>
+            </a:gs>
+            <a:gs pos="50000">
+              <a:schemeClr val="phClr">
+                <a:satMod val="110000"/>
+                <a:lumMod val="100000"/>
+                <a:shade val="100000"/>
+              </a:schemeClr>
+            </a:gs>
+            <a:gs pos="100000">
+              <a:schemeClr val="phClr">
+                <a:lumMod val="99000"/>
+                <a:satMod val="120000"/>
+                <a:shade val="78000"/>
+              </a:schemeClr>
+            </a:gs>
+          </a:gsLst>
+          <a:lin ang="5400000" scaled="0"/>
+        </a:gradFill>
+      </a:fillStyleLst>
+      <a:lnStyleLst>
+        <a:ln w="6350" cap="flat" cmpd="sng" algn="ctr">
+          <a:solidFill>
+            <a:schemeClr val="phClr"/>
+          </a:solidFill>
+          <a:prstDash val="solid"/>
+          <a:miter lim="800000"/>
+        </a:ln>
+        <a:ln w="12700" cap="flat" cmpd="sng" algn="ctr">
+          <a:solidFill>
+            <a:schemeClr val="phClr"/>
+          </a:solidFill>
+          <a:prstDash val="solid"/>
+          <a:miter lim="800000"/>
+        </a:ln>
+        <a:ln w="19050" cap="flat" cmpd="sng" algn="ctr">
+          <a:solidFill>
+            <a:schemeClr val="phClr"/>
+          </a:solidFill>
+          <a:prstDash val="solid"/>
+          <a:miter lim="800000"/>
+        </a:ln>
+      </a:lnStyleLst>
+      <a:effectStyleLst>
+        <a:effectStyle>
+          <a:effectLst/>
+        </a:effectStyle>
+        <a:effectStyle>
+          <a:effectLst/>
+        </a:effectStyle>
+        <a:effectStyle>
+          <a:effectLst>
+            <a:outerShdw blurRad="57150" dist="19050" dir="5400000" algn="ctr" rotWithShape="0">
+              <a:srgbClr val="000000">
+                <a:alpha val="63000"/>
+              </a:srgbClr>
+            </a:outerShdw>
+          </a:effectLst>
+        </a:effectStyle>
+      </a:effectStyleLst>
+      <a:bgFillStyleLst>
+        <a:solidFill>
+          <a:schemeClr val="phClr"/>
+        </a:solidFill>
+        <a:solidFill>
+          <a:schemeClr val="phClr">
+            <a:tint val="95000"/>
+            <a:satMod val="170000"/>
+          </a:schemeClr>
+        </a:solidFill>
+        <a:gradFill rotWithShape="1">
+          <a:gsLst>
+            <a:gs pos="0">
+              <a:schemeClr val="phClr">
+                <a:tint val="93000"/>
+                <a:satMod val="150000"/>
+                <a:shade val="98000"/>
+                <a:lumMod val="102000"/>
+              </a:schemeClr>
+            </a:gs>
+            <a:gs pos="50000">
+              <a:schemeClr val="phClr">
+                <a:tint val="98000"/>
+                <a:satMod val="130000"/>
+                <a:shade val="90000"/>
+                <a:lumMod val="103000"/>
+              </a:schemeClr>
+            </a:gs>
+            <a:gs pos="100000">
+              <a:schemeClr val="phClr">
+                <a:shade val="63000"/>
+                <a:satMod val="120000"/>
+              </a:schemeClr>
+            </a:gs>
+          </a:gsLst>
+          <a:lin ang="5400000" scaled="0"/>
+        </a:gradFill>
+      </a:bgFillStyleLst>
+    </a:fmtScheme>
+  </a:themeElements>
+  <a:objectDefaults/>
+  <a:extraClrSchemeLst/>
+  <a:extLst>
+    <a:ext uri="{05A4C25C-085E-4340-85A3-A5531E510DB2}">
+      <thm15:themeFamily xmlns:thm15="http://schemas.microsoft.com/office/thememl/2012/main" name="Office Theme" id="{62F939B6-93AF-4DB8-9C6B-D6C7DFDC589F}" vid="{4A3C46E8-61CC-4603-A589-7422A47A8E4A}"/>
+    </a:ext>
+  </a:extLst>
+</a:theme>
+</file>
+
 <file path=customXml/item1.xml><?xml version="1.0" encoding="utf-8"?>
 <p:properties xmlns:p="http://schemas.microsoft.com/office/2006/metadata/properties" xmlns:xsi="http://www.w3.org/2001/XMLSchema-instance" xmlns:pc="http://schemas.microsoft.com/office/infopath/2007/PartnerControls">
   <documentManagement>
@@ -17783,15 +20197,6 @@
 </file>
 
 <file path=customXml/item2.xml><?xml version="1.0" encoding="utf-8"?>
-<?mso-contentType ?>
-<FormTemplates xmlns="http://schemas.microsoft.com/sharepoint/v3/contenttype/forms">
-  <Display>DocumentLibraryForm</Display>
-  <Edit>DocumentLibraryForm</Edit>
-  <New>DocumentLibraryForm</New>
-</FormTemplates>
-</file>
-
-<file path=customXml/item3.xml><?xml version="1.0" encoding="utf-8"?>
 <ct:contentTypeSchema xmlns:ct="http://schemas.microsoft.com/office/2006/metadata/contentType" xmlns:ma="http://schemas.microsoft.com/office/2006/metadata/properties/metaAttributes" ct:_="" ma:_="" ma:contentTypeName="Document" ma:contentTypeID="0x0101002FE71A6B924FC94981CCAD1A585590D8" ma:contentTypeVersion="27" ma:contentTypeDescription="Create a new document." ma:contentTypeScope="" ma:versionID="566528f2922ad54e26a908d2133454c1">
   <xsd:schema xmlns:xsd="http://www.w3.org/2001/XMLSchema" xmlns:xs="http://www.w3.org/2001/XMLSchema" xmlns:p="http://schemas.microsoft.com/office/2006/metadata/properties" xmlns:ns1="http://schemas.microsoft.com/sharepoint/v3" xmlns:ns2="804751ba-60e0-4191-9865-d7e5284c1d69" xmlns:ns3="913b567d-4c83-4181-a45c-f04ce7e1b72e" xmlns:ns4="230e9df3-be65-4c73-a93b-d1236ebd677e" targetNamespace="http://schemas.microsoft.com/office/2006/metadata/properties" ma:root="true" ma:fieldsID="6c91453d1ce2972ce38a1123b4b20cb5" ns1:_="" ns2:_="" ns3:_="" ns4:_="">
     <xsd:import namespace="http://schemas.microsoft.com/sharepoint/v3"/>
@@ -18098,34 +20503,35 @@
 </ct:contentTypeSchema>
 </file>
 
+<file path=customXml/item3.xml><?xml version="1.0" encoding="utf-8"?>
+<?mso-contentType ?>
+<FormTemplates xmlns="http://schemas.microsoft.com/sharepoint/v3/contenttype/forms">
+  <Display>DocumentLibraryForm</Display>
+  <Edit>DocumentLibraryForm</Edit>
+  <New>DocumentLibraryForm</New>
+</FormTemplates>
+</file>
+
 <file path=customXml/itemProps1.xml><?xml version="1.0" encoding="utf-8"?>
 <ds:datastoreItem xmlns:ds="http://schemas.openxmlformats.org/officeDocument/2006/customXml" ds:itemID="{97BDA820-30C0-4D9F-8489-BC57A9B4C6C1}">
   <ds:schemaRefs>
-    <ds:schemaRef ds:uri="http://purl.org/dc/dcmitype/"/>
+    <ds:schemaRef ds:uri="http://www.w3.org/XML/1998/namespace"/>
+    <ds:schemaRef ds:uri="http://schemas.microsoft.com/sharepoint/v3"/>
+    <ds:schemaRef ds:uri="http://schemas.microsoft.com/office/2006/documentManagement/types"/>
     <ds:schemaRef ds:uri="http://schemas.microsoft.com/office/infopath/2007/PartnerControls"/>
-    <ds:schemaRef ds:uri="http://schemas.microsoft.com/office/2006/documentManagement/types"/>
-    <ds:schemaRef ds:uri="913b567d-4c83-4181-a45c-f04ce7e1b72e"/>
-    <ds:schemaRef ds:uri="http://schemas.openxmlformats.org/package/2006/metadata/core-properties"/>
     <ds:schemaRef ds:uri="http://purl.org/dc/elements/1.1/"/>
-    <ds:schemaRef ds:uri="http://schemas.microsoft.com/office/2006/metadata/properties"/>
-    <ds:schemaRef ds:uri="230e9df3-be65-4c73-a93b-d1236ebd677e"/>
     <ds:schemaRef ds:uri="http://purl.org/dc/terms/"/>
     <ds:schemaRef ds:uri="804751ba-60e0-4191-9865-d7e5284c1d69"/>
-    <ds:schemaRef ds:uri="http://schemas.microsoft.com/sharepoint/v3"/>
-    <ds:schemaRef ds:uri="http://www.w3.org/XML/1998/namespace"/>
+    <ds:schemaRef ds:uri="http://schemas.openxmlformats.org/package/2006/metadata/core-properties"/>
+    <ds:schemaRef ds:uri="913b567d-4c83-4181-a45c-f04ce7e1b72e"/>
+    <ds:schemaRef ds:uri="230e9df3-be65-4c73-a93b-d1236ebd677e"/>
+    <ds:schemaRef ds:uri="http://schemas.microsoft.com/office/2006/metadata/properties"/>
+    <ds:schemaRef ds:uri="http://purl.org/dc/dcmitype/"/>
   </ds:schemaRefs>
 </ds:datastoreItem>
 </file>
 
 <file path=customXml/itemProps2.xml><?xml version="1.0" encoding="utf-8"?>
-<ds:datastoreItem xmlns:ds="http://schemas.openxmlformats.org/officeDocument/2006/customXml" ds:itemID="{EF9257C1-DA2E-4D15-9ED2-522580AE872C}">
-  <ds:schemaRefs>
-    <ds:schemaRef ds:uri="http://schemas.microsoft.com/sharepoint/v3/contenttype/forms"/>
-  </ds:schemaRefs>
-</ds:datastoreItem>
-</file>
-
-<file path=customXml/itemProps3.xml><?xml version="1.0" encoding="utf-8"?>
 <ds:datastoreItem xmlns:ds="http://schemas.openxmlformats.org/officeDocument/2006/customXml" ds:itemID="{B8B2AE3B-9ECC-455B-99BA-9B424CF2E7A0}">
   <ds:schemaRefs>
     <ds:schemaRef ds:uri="http://schemas.microsoft.com/office/2006/metadata/contentType"/>
@@ -18146,8 +20552,16 @@
 </ds:datastoreItem>
 </file>
 
+<file path=customXml/itemProps3.xml><?xml version="1.0" encoding="utf-8"?>
+<ds:datastoreItem xmlns:ds="http://schemas.openxmlformats.org/officeDocument/2006/customXml" ds:itemID="{EF9257C1-DA2E-4D15-9ED2-522580AE872C}">
+  <ds:schemaRefs>
+    <ds:schemaRef ds:uri="http://schemas.microsoft.com/sharepoint/v3/contenttype/forms"/>
+  </ds:schemaRefs>
+</ds:datastoreItem>
+</file>
+
 <file path=docMetadata/LabelInfo.xml><?xml version="1.0" encoding="utf-8"?>
 <clbl:labelList xmlns:clbl="http://schemas.microsoft.com/office/2020/mipLabelMetadata">
-  <clbl:label id="{1a19d03a-48bc-4359-8038-5b5f6d5847c3}" enabled="1" method="Standard" siteId="{72f988bf-86f1-41af-91ab-2d7cd011db47}" removed="0"/>
+  <clbl:label id="{87867195-f2b8-4ac2-b0b6-6bb73cb33afc}" enabled="1" method="Privileged" siteId="{72f988bf-86f1-41af-91ab-2d7cd011db47}" removed="0"/>
 </clbl:labelList>
 </file>